--- a/class/cloud_infra_mgmt/00주차_VM환경구성/01_강의자료/0주차_VM환경구성.pptx
+++ b/class/cloud_infra_mgmt/00주차_VM환경구성/01_강의자료/0주차_VM환경구성.pptx
@@ -13072,7 +13072,7 @@
               </a:lnSpc>
             </a:pPr>
             <a:r>
-              <a:rPr sz="1500" b="0">
+              <a:rPr sz="1700" b="0">
                 <a:solidFill>
                   <a:srgbClr val="222733"/>
                 </a:solidFill>
@@ -13088,7 +13088,7 @@
               </a:lnSpc>
             </a:pPr>
             <a:r>
-              <a:rPr sz="1500" b="0">
+              <a:rPr sz="1700" b="0">
                 <a:solidFill>
                   <a:srgbClr val="222733"/>
                 </a:solidFill>
@@ -13104,7 +13104,7 @@
               </a:lnSpc>
             </a:pPr>
             <a:r>
-              <a:rPr sz="1500" b="0">
+              <a:rPr sz="1700" b="0">
                 <a:solidFill>
                   <a:srgbClr val="222733"/>
                 </a:solidFill>
@@ -13120,7 +13120,7 @@
               </a:lnSpc>
             </a:pPr>
             <a:r>
-              <a:rPr sz="1500" b="0">
+              <a:rPr sz="1700" b="0">
                 <a:solidFill>
                   <a:srgbClr val="222733"/>
                 </a:solidFill>
@@ -13136,7 +13136,7 @@
               </a:lnSpc>
             </a:pPr>
             <a:r>
-              <a:rPr sz="1500" b="0">
+              <a:rPr sz="1700" b="0">
                 <a:solidFill>
                   <a:srgbClr val="222733"/>
                 </a:solidFill>

--- a/class/cloud_infra_mgmt/00주차_VM환경구성/01_강의자료/0주차_VM환경구성.pptx
+++ b/class/cloud_infra_mgmt/00주차_VM환경구성/01_강의자료/0주차_VM환경구성.pptx
@@ -5713,7 +5713,7 @@
           <a:p>
             <a:pPr>
               <a:lnSpc>
-                <a:spcPct val="115000"/>
+                <a:spcPct val="149500"/>
               </a:lnSpc>
             </a:pPr>
             <a:r>
@@ -5738,7 +5738,7 @@
           <a:p>
             <a:pPr>
               <a:lnSpc>
-                <a:spcPct val="115000"/>
+                <a:spcPct val="149500"/>
               </a:lnSpc>
             </a:pPr>
             <a:r>
@@ -5763,7 +5763,7 @@
           <a:p>
             <a:pPr>
               <a:lnSpc>
-                <a:spcPct val="115000"/>
+                <a:spcPct val="149500"/>
               </a:lnSpc>
             </a:pPr>
             <a:r>
@@ -6497,7 +6497,7 @@
           <a:p>
             <a:pPr>
               <a:lnSpc>
-                <a:spcPct val="115000"/>
+                <a:spcPct val="149500"/>
               </a:lnSpc>
             </a:pPr>
             <a:r>
@@ -6522,7 +6522,7 @@
           <a:p>
             <a:pPr>
               <a:lnSpc>
-                <a:spcPct val="115000"/>
+                <a:spcPct val="149500"/>
               </a:lnSpc>
             </a:pPr>
             <a:r>
@@ -6547,7 +6547,7 @@
           <a:p>
             <a:pPr>
               <a:lnSpc>
-                <a:spcPct val="115000"/>
+                <a:spcPct val="149500"/>
               </a:lnSpc>
             </a:pPr>
             <a:r>
@@ -6572,7 +6572,7 @@
           <a:p>
             <a:pPr>
               <a:lnSpc>
-                <a:spcPct val="115000"/>
+                <a:spcPct val="149500"/>
               </a:lnSpc>
             </a:pPr>
             <a:r>
@@ -6963,7 +6963,7 @@
           <a:p>
             <a:pPr>
               <a:lnSpc>
-                <a:spcPct val="115000"/>
+                <a:spcPct val="149500"/>
               </a:lnSpc>
             </a:pPr>
             <a:r>
@@ -6988,7 +6988,7 @@
           <a:p>
             <a:pPr>
               <a:lnSpc>
-                <a:spcPct val="115000"/>
+                <a:spcPct val="149500"/>
               </a:lnSpc>
             </a:pPr>
             <a:r>
@@ -7013,7 +7013,7 @@
           <a:p>
             <a:pPr>
               <a:lnSpc>
-                <a:spcPct val="115000"/>
+                <a:spcPct val="149500"/>
               </a:lnSpc>
             </a:pPr>
             <a:r>
@@ -7518,7 +7518,7 @@
           <a:p>
             <a:pPr>
               <a:lnSpc>
-                <a:spcPct val="115000"/>
+                <a:spcPct val="149500"/>
               </a:lnSpc>
             </a:pPr>
             <a:r>
@@ -7543,7 +7543,7 @@
           <a:p>
             <a:pPr>
               <a:lnSpc>
-                <a:spcPct val="115000"/>
+                <a:spcPct val="149500"/>
               </a:lnSpc>
             </a:pPr>
             <a:r>
@@ -7568,7 +7568,7 @@
           <a:p>
             <a:pPr>
               <a:lnSpc>
-                <a:spcPct val="115000"/>
+                <a:spcPct val="149500"/>
               </a:lnSpc>
             </a:pPr>
             <a:r>
@@ -9092,16 +9092,104 @@
       </p:sp>
       <p:sp>
         <p:nvSpPr>
-          <p:cNvPr id="7" name="Isosceles Triangle 6"/>
+          <p:cNvPr id="7" name="Rectangle 6"/>
           <p:cNvSpPr/>
           <p:nvPr/>
         </p:nvSpPr>
         <p:spPr>
-          <a:xfrm rot="5400000">
-            <a:off x="3495751" y="1673352"/>
-            <a:ext cx="146304" cy="146304"/>
-          </a:xfrm>
-          <a:prstGeom prst="triangle">
+          <a:xfrm>
+            <a:off x="5096865" y="1730959"/>
+            <a:ext cx="1995220" cy="31089"/>
+          </a:xfrm>
+          <a:prstGeom prst="rect">
+            <a:avLst/>
+          </a:prstGeom>
+          <a:solidFill>
+            <a:srgbClr val="14B8A6"/>
+          </a:solidFill>
+          <a:ln>
+            <a:noFill/>
+          </a:ln>
+          <a:effectLst/>
+        </p:spPr>
+        <p:style>
+          <a:lnRef idx="1">
+            <a:schemeClr val="accent1"/>
+          </a:lnRef>
+          <a:fillRef idx="3">
+            <a:schemeClr val="accent1"/>
+          </a:fillRef>
+          <a:effectRef idx="2">
+            <a:schemeClr val="accent1"/>
+          </a:effectRef>
+          <a:fontRef idx="minor">
+            <a:schemeClr val="lt1"/>
+          </a:fontRef>
+        </p:style>
+        <p:txBody>
+          <a:bodyPr rtlCol="0" anchor="ctr"/>
+          <a:lstStyle/>
+          <a:p>
+            <a:pPr algn="ctr"/>
+          </a:p>
+        </p:txBody>
+      </p:sp>
+      <p:sp>
+        <p:nvSpPr>
+          <p:cNvPr id="8" name="Rectangle 7"/>
+          <p:cNvSpPr/>
+          <p:nvPr/>
+        </p:nvSpPr>
+        <p:spPr>
+          <a:xfrm>
+            <a:off x="7622438" y="1730959"/>
+            <a:ext cx="1995220" cy="31089"/>
+          </a:xfrm>
+          <a:prstGeom prst="rect">
+            <a:avLst/>
+          </a:prstGeom>
+          <a:solidFill>
+            <a:srgbClr val="14B8A6"/>
+          </a:solidFill>
+          <a:ln>
+            <a:noFill/>
+          </a:ln>
+          <a:effectLst/>
+        </p:spPr>
+        <p:style>
+          <a:lnRef idx="1">
+            <a:schemeClr val="accent1"/>
+          </a:lnRef>
+          <a:fillRef idx="3">
+            <a:schemeClr val="accent1"/>
+          </a:fillRef>
+          <a:effectRef idx="2">
+            <a:schemeClr val="accent1"/>
+          </a:effectRef>
+          <a:fontRef idx="minor">
+            <a:schemeClr val="lt1"/>
+          </a:fontRef>
+        </p:style>
+        <p:txBody>
+          <a:bodyPr rtlCol="0" anchor="ctr"/>
+          <a:lstStyle/>
+          <a:p>
+            <a:pPr algn="ctr"/>
+          </a:p>
+        </p:txBody>
+      </p:sp>
+      <p:sp>
+        <p:nvSpPr>
+          <p:cNvPr id="9" name="Oval 8"/>
+          <p:cNvSpPr/>
+          <p:nvPr/>
+        </p:nvSpPr>
+        <p:spPr>
+          <a:xfrm>
+            <a:off x="2040940" y="1481328"/>
+            <a:ext cx="530352" cy="530352"/>
+          </a:xfrm>
+          <a:prstGeom prst="ellipse">
             <a:avLst/>
           </a:prstGeom>
           <a:solidFill>
@@ -9136,227 +9224,7 @@
       </p:sp>
       <p:sp>
         <p:nvSpPr>
-          <p:cNvPr id="8" name="Rectangle 7"/>
-          <p:cNvSpPr/>
-          <p:nvPr/>
-        </p:nvSpPr>
-        <p:spPr>
-          <a:xfrm>
-            <a:off x="5096865" y="1730959"/>
-            <a:ext cx="1995220" cy="31089"/>
-          </a:xfrm>
-          <a:prstGeom prst="rect">
-            <a:avLst/>
-          </a:prstGeom>
-          <a:solidFill>
-            <a:srgbClr val="14B8A6"/>
-          </a:solidFill>
-          <a:ln>
-            <a:noFill/>
-          </a:ln>
-          <a:effectLst/>
-        </p:spPr>
-        <p:style>
-          <a:lnRef idx="1">
-            <a:schemeClr val="accent1"/>
-          </a:lnRef>
-          <a:fillRef idx="3">
-            <a:schemeClr val="accent1"/>
-          </a:fillRef>
-          <a:effectRef idx="2">
-            <a:schemeClr val="accent1"/>
-          </a:effectRef>
-          <a:fontRef idx="minor">
-            <a:schemeClr val="lt1"/>
-          </a:fontRef>
-        </p:style>
-        <p:txBody>
-          <a:bodyPr rtlCol="0" anchor="ctr"/>
-          <a:lstStyle/>
-          <a:p>
-            <a:pPr algn="ctr"/>
-          </a:p>
-        </p:txBody>
-      </p:sp>
-      <p:sp>
-        <p:nvSpPr>
-          <p:cNvPr id="9" name="Isosceles Triangle 8"/>
-          <p:cNvSpPr/>
-          <p:nvPr/>
-        </p:nvSpPr>
-        <p:spPr>
-          <a:xfrm rot="5400000">
-            <a:off x="6021324" y="1673352"/>
-            <a:ext cx="146304" cy="146304"/>
-          </a:xfrm>
-          <a:prstGeom prst="triangle">
-            <a:avLst/>
-          </a:prstGeom>
-          <a:solidFill>
-            <a:srgbClr val="0D9488"/>
-          </a:solidFill>
-          <a:ln>
-            <a:noFill/>
-          </a:ln>
-          <a:effectLst/>
-        </p:spPr>
-        <p:style>
-          <a:lnRef idx="1">
-            <a:schemeClr val="accent1"/>
-          </a:lnRef>
-          <a:fillRef idx="3">
-            <a:schemeClr val="accent1"/>
-          </a:fillRef>
-          <a:effectRef idx="2">
-            <a:schemeClr val="accent1"/>
-          </a:effectRef>
-          <a:fontRef idx="minor">
-            <a:schemeClr val="lt1"/>
-          </a:fontRef>
-        </p:style>
-        <p:txBody>
-          <a:bodyPr rtlCol="0" anchor="ctr"/>
-          <a:lstStyle/>
-          <a:p>
-            <a:pPr algn="ctr"/>
-          </a:p>
-        </p:txBody>
-      </p:sp>
-      <p:sp>
-        <p:nvSpPr>
-          <p:cNvPr id="10" name="Rectangle 9"/>
-          <p:cNvSpPr/>
-          <p:nvPr/>
-        </p:nvSpPr>
-        <p:spPr>
-          <a:xfrm>
-            <a:off x="7622438" y="1730959"/>
-            <a:ext cx="1995220" cy="31089"/>
-          </a:xfrm>
-          <a:prstGeom prst="rect">
-            <a:avLst/>
-          </a:prstGeom>
-          <a:solidFill>
-            <a:srgbClr val="14B8A6"/>
-          </a:solidFill>
-          <a:ln>
-            <a:noFill/>
-          </a:ln>
-          <a:effectLst/>
-        </p:spPr>
-        <p:style>
-          <a:lnRef idx="1">
-            <a:schemeClr val="accent1"/>
-          </a:lnRef>
-          <a:fillRef idx="3">
-            <a:schemeClr val="accent1"/>
-          </a:fillRef>
-          <a:effectRef idx="2">
-            <a:schemeClr val="accent1"/>
-          </a:effectRef>
-          <a:fontRef idx="minor">
-            <a:schemeClr val="lt1"/>
-          </a:fontRef>
-        </p:style>
-        <p:txBody>
-          <a:bodyPr rtlCol="0" anchor="ctr"/>
-          <a:lstStyle/>
-          <a:p>
-            <a:pPr algn="ctr"/>
-          </a:p>
-        </p:txBody>
-      </p:sp>
-      <p:sp>
-        <p:nvSpPr>
-          <p:cNvPr id="11" name="Isosceles Triangle 10"/>
-          <p:cNvSpPr/>
-          <p:nvPr/>
-        </p:nvSpPr>
-        <p:spPr>
-          <a:xfrm rot="5400000">
-            <a:off x="8546896" y="1673352"/>
-            <a:ext cx="146304" cy="146304"/>
-          </a:xfrm>
-          <a:prstGeom prst="triangle">
-            <a:avLst/>
-          </a:prstGeom>
-          <a:solidFill>
-            <a:srgbClr val="0D9488"/>
-          </a:solidFill>
-          <a:ln>
-            <a:noFill/>
-          </a:ln>
-          <a:effectLst/>
-        </p:spPr>
-        <p:style>
-          <a:lnRef idx="1">
-            <a:schemeClr val="accent1"/>
-          </a:lnRef>
-          <a:fillRef idx="3">
-            <a:schemeClr val="accent1"/>
-          </a:fillRef>
-          <a:effectRef idx="2">
-            <a:schemeClr val="accent1"/>
-          </a:effectRef>
-          <a:fontRef idx="minor">
-            <a:schemeClr val="lt1"/>
-          </a:fontRef>
-        </p:style>
-        <p:txBody>
-          <a:bodyPr rtlCol="0" anchor="ctr"/>
-          <a:lstStyle/>
-          <a:p>
-            <a:pPr algn="ctr"/>
-          </a:p>
-        </p:txBody>
-      </p:sp>
-      <p:sp>
-        <p:nvSpPr>
-          <p:cNvPr id="12" name="Oval 11"/>
-          <p:cNvSpPr/>
-          <p:nvPr/>
-        </p:nvSpPr>
-        <p:spPr>
-          <a:xfrm>
-            <a:off x="2040940" y="1481328"/>
-            <a:ext cx="530352" cy="530352"/>
-          </a:xfrm>
-          <a:prstGeom prst="ellipse">
-            <a:avLst/>
-          </a:prstGeom>
-          <a:solidFill>
-            <a:srgbClr val="0D9488"/>
-          </a:solidFill>
-          <a:ln>
-            <a:noFill/>
-          </a:ln>
-          <a:effectLst/>
-        </p:spPr>
-        <p:style>
-          <a:lnRef idx="1">
-            <a:schemeClr val="accent1"/>
-          </a:lnRef>
-          <a:fillRef idx="3">
-            <a:schemeClr val="accent1"/>
-          </a:fillRef>
-          <a:effectRef idx="2">
-            <a:schemeClr val="accent1"/>
-          </a:effectRef>
-          <a:fontRef idx="minor">
-            <a:schemeClr val="lt1"/>
-          </a:fontRef>
-        </p:style>
-        <p:txBody>
-          <a:bodyPr rtlCol="0" anchor="ctr"/>
-          <a:lstStyle/>
-          <a:p>
-            <a:pPr algn="ctr"/>
-          </a:p>
-        </p:txBody>
-      </p:sp>
-      <p:sp>
-        <p:nvSpPr>
-          <p:cNvPr id="13" name="TextBox 12"/>
+          <p:cNvPr id="10" name="TextBox 9"/>
           <p:cNvSpPr txBox="1"/>
           <p:nvPr/>
         </p:nvSpPr>
@@ -9391,7 +9259,7 @@
       </p:sp>
       <p:sp>
         <p:nvSpPr>
-          <p:cNvPr id="14" name="Rounded Rectangle 13"/>
+          <p:cNvPr id="11" name="Rounded Rectangle 10"/>
           <p:cNvSpPr/>
           <p:nvPr/>
         </p:nvSpPr>
@@ -9439,7 +9307,7 @@
       </p:sp>
       <p:sp>
         <p:nvSpPr>
-          <p:cNvPr id="15" name="TextBox 14"/>
+          <p:cNvPr id="12" name="TextBox 11"/>
           <p:cNvSpPr txBox="1"/>
           <p:nvPr/>
         </p:nvSpPr>
@@ -9474,7 +9342,7 @@
       </p:sp>
       <p:sp>
         <p:nvSpPr>
-          <p:cNvPr id="16" name="TextBox 15"/>
+          <p:cNvPr id="13" name="TextBox 12"/>
           <p:cNvSpPr txBox="1"/>
           <p:nvPr/>
         </p:nvSpPr>
@@ -9513,7 +9381,7 @@
       </p:sp>
       <p:sp>
         <p:nvSpPr>
-          <p:cNvPr id="17" name="Oval 16"/>
+          <p:cNvPr id="14" name="Oval 13"/>
           <p:cNvSpPr/>
           <p:nvPr/>
         </p:nvSpPr>
@@ -9557,7 +9425,7 @@
       </p:sp>
       <p:sp>
         <p:nvSpPr>
-          <p:cNvPr id="18" name="TextBox 17"/>
+          <p:cNvPr id="15" name="TextBox 14"/>
           <p:cNvSpPr txBox="1"/>
           <p:nvPr/>
         </p:nvSpPr>
@@ -9592,7 +9460,7 @@
       </p:sp>
       <p:sp>
         <p:nvSpPr>
-          <p:cNvPr id="19" name="Rounded Rectangle 18"/>
+          <p:cNvPr id="16" name="Rounded Rectangle 15"/>
           <p:cNvSpPr/>
           <p:nvPr/>
         </p:nvSpPr>
@@ -9640,7 +9508,7 @@
       </p:sp>
       <p:sp>
         <p:nvSpPr>
-          <p:cNvPr id="20" name="TextBox 19"/>
+          <p:cNvPr id="17" name="TextBox 16"/>
           <p:cNvSpPr txBox="1"/>
           <p:nvPr/>
         </p:nvSpPr>
@@ -9675,7 +9543,7 @@
       </p:sp>
       <p:sp>
         <p:nvSpPr>
-          <p:cNvPr id="21" name="TextBox 20"/>
+          <p:cNvPr id="18" name="TextBox 17"/>
           <p:cNvSpPr txBox="1"/>
           <p:nvPr/>
         </p:nvSpPr>
@@ -9714,7 +9582,7 @@
       </p:sp>
       <p:sp>
         <p:nvSpPr>
-          <p:cNvPr id="22" name="Oval 21"/>
+          <p:cNvPr id="19" name="Oval 18"/>
           <p:cNvSpPr/>
           <p:nvPr/>
         </p:nvSpPr>
@@ -9758,7 +9626,7 @@
       </p:sp>
       <p:sp>
         <p:nvSpPr>
-          <p:cNvPr id="23" name="TextBox 22"/>
+          <p:cNvPr id="20" name="TextBox 19"/>
           <p:cNvSpPr txBox="1"/>
           <p:nvPr/>
         </p:nvSpPr>
@@ -9793,7 +9661,7 @@
       </p:sp>
       <p:sp>
         <p:nvSpPr>
-          <p:cNvPr id="24" name="Rounded Rectangle 23"/>
+          <p:cNvPr id="21" name="Rounded Rectangle 20"/>
           <p:cNvSpPr/>
           <p:nvPr/>
         </p:nvSpPr>
@@ -9841,7 +9709,7 @@
       </p:sp>
       <p:sp>
         <p:nvSpPr>
-          <p:cNvPr id="25" name="TextBox 24"/>
+          <p:cNvPr id="22" name="TextBox 21"/>
           <p:cNvSpPr txBox="1"/>
           <p:nvPr/>
         </p:nvSpPr>
@@ -9876,7 +9744,7 @@
       </p:sp>
       <p:sp>
         <p:nvSpPr>
-          <p:cNvPr id="26" name="TextBox 25"/>
+          <p:cNvPr id="23" name="TextBox 22"/>
           <p:cNvSpPr txBox="1"/>
           <p:nvPr/>
         </p:nvSpPr>
@@ -9915,7 +9783,7 @@
       </p:sp>
       <p:sp>
         <p:nvSpPr>
-          <p:cNvPr id="27" name="Oval 26"/>
+          <p:cNvPr id="24" name="Oval 23"/>
           <p:cNvSpPr/>
           <p:nvPr/>
         </p:nvSpPr>
@@ -9959,7 +9827,7 @@
       </p:sp>
       <p:sp>
         <p:nvSpPr>
-          <p:cNvPr id="28" name="TextBox 27"/>
+          <p:cNvPr id="25" name="TextBox 24"/>
           <p:cNvSpPr txBox="1"/>
           <p:nvPr/>
         </p:nvSpPr>
@@ -9994,7 +9862,7 @@
       </p:sp>
       <p:sp>
         <p:nvSpPr>
-          <p:cNvPr id="29" name="Rounded Rectangle 28"/>
+          <p:cNvPr id="26" name="Rounded Rectangle 25"/>
           <p:cNvSpPr/>
           <p:nvPr/>
         </p:nvSpPr>
@@ -10042,7 +9910,7 @@
       </p:sp>
       <p:sp>
         <p:nvSpPr>
-          <p:cNvPr id="30" name="TextBox 29"/>
+          <p:cNvPr id="27" name="TextBox 26"/>
           <p:cNvSpPr txBox="1"/>
           <p:nvPr/>
         </p:nvSpPr>
@@ -10077,7 +9945,7 @@
       </p:sp>
       <p:sp>
         <p:nvSpPr>
-          <p:cNvPr id="31" name="TextBox 30"/>
+          <p:cNvPr id="28" name="TextBox 27"/>
           <p:cNvSpPr txBox="1"/>
           <p:nvPr/>
         </p:nvSpPr>
@@ -10116,7 +9984,7 @@
       </p:sp>
       <p:sp>
         <p:nvSpPr>
-          <p:cNvPr id="32" name="TextBox 31"/>
+          <p:cNvPr id="29" name="TextBox 28"/>
           <p:cNvSpPr txBox="1"/>
           <p:nvPr/>
         </p:nvSpPr>
@@ -10151,7 +10019,7 @@
       </p:sp>
       <p:sp>
         <p:nvSpPr>
-          <p:cNvPr id="33" name="TextBox 32"/>
+          <p:cNvPr id="30" name="TextBox 29"/>
           <p:cNvSpPr txBox="1"/>
           <p:nvPr/>
         </p:nvSpPr>
@@ -10186,7 +10054,7 @@
       </p:sp>
       <p:sp>
         <p:nvSpPr>
-          <p:cNvPr id="34" name="Rectangle 33"/>
+          <p:cNvPr id="31" name="Rectangle 30"/>
           <p:cNvSpPr/>
           <p:nvPr/>
         </p:nvSpPr>
@@ -10710,7 +10578,7 @@
           <a:p>
             <a:pPr>
               <a:lnSpc>
-                <a:spcPct val="115000"/>
+                <a:spcPct val="149500"/>
               </a:lnSpc>
             </a:pPr>
             <a:r>
@@ -10735,7 +10603,7 @@
           <a:p>
             <a:pPr>
               <a:lnSpc>
-                <a:spcPct val="115000"/>
+                <a:spcPct val="149500"/>
               </a:lnSpc>
             </a:pPr>
             <a:r>
@@ -10760,7 +10628,7 @@
           <a:p>
             <a:pPr>
               <a:lnSpc>
-                <a:spcPct val="115000"/>
+                <a:spcPct val="149500"/>
               </a:lnSpc>
             </a:pPr>
             <a:r>
@@ -12627,7 +12495,7 @@
           <a:p>
             <a:pPr>
               <a:lnSpc>
-                <a:spcPct val="115000"/>
+                <a:spcPct val="149500"/>
               </a:lnSpc>
             </a:pPr>
             <a:r>
@@ -12652,7 +12520,7 @@
           <a:p>
             <a:pPr>
               <a:lnSpc>
-                <a:spcPct val="115000"/>
+                <a:spcPct val="149500"/>
               </a:lnSpc>
             </a:pPr>
             <a:r>
@@ -12677,7 +12545,7 @@
           <a:p>
             <a:pPr>
               <a:lnSpc>
-                <a:spcPct val="115000"/>
+                <a:spcPct val="149500"/>
               </a:lnSpc>
             </a:pPr>
             <a:r>
@@ -13068,7 +12936,7 @@
           <a:p>
             <a:pPr>
               <a:lnSpc>
-                <a:spcPct val="115000"/>
+                <a:spcPct val="149500"/>
               </a:lnSpc>
             </a:pPr>
             <a:r>
@@ -13084,7 +12952,7 @@
           <a:p>
             <a:pPr>
               <a:lnSpc>
-                <a:spcPct val="115000"/>
+                <a:spcPct val="149500"/>
               </a:lnSpc>
             </a:pPr>
             <a:r>
@@ -13100,7 +12968,7 @@
           <a:p>
             <a:pPr>
               <a:lnSpc>
-                <a:spcPct val="115000"/>
+                <a:spcPct val="149500"/>
               </a:lnSpc>
             </a:pPr>
             <a:r>
@@ -13116,7 +12984,7 @@
           <a:p>
             <a:pPr>
               <a:lnSpc>
-                <a:spcPct val="115000"/>
+                <a:spcPct val="149500"/>
               </a:lnSpc>
             </a:pPr>
             <a:r>
@@ -13132,7 +13000,7 @@
           <a:p>
             <a:pPr>
               <a:lnSpc>
-                <a:spcPct val="115000"/>
+                <a:spcPct val="149500"/>
               </a:lnSpc>
             </a:pPr>
             <a:r>

--- a/class/cloud_infra_mgmt/00주차_VM환경구성/01_강의자료/0주차_VM환경구성.pptx
+++ b/class/cloud_infra_mgmt/00주차_VM환경구성/01_강의자료/0주차_VM환경구성.pptx
@@ -5349,6 +5349,8 @@
                   <a:srgbClr val="14B8A6"/>
                 </a:solidFill>
                 <a:latin typeface="맑은 고딕"/>
+                <a:ea typeface="맑은 고딕"/>
+                <a:cs typeface="맑은 고딕"/>
               </a:rPr>
               <a:t>클라우드인프라관리  ·  0주차 오리엔테이션</a:t>
             </a:r>
@@ -5384,6 +5386,8 @@
                   <a:srgbClr val="FFFFFF"/>
                 </a:solidFill>
                 <a:latin typeface="맑은 고딕"/>
+                <a:ea typeface="맑은 고딕"/>
+                <a:cs typeface="맑은 고딕"/>
               </a:rPr>
               <a:t>실습 VM 환경 구성</a:t>
             </a:r>
@@ -5419,6 +5423,8 @@
                   <a:srgbClr val="C9D3E6"/>
                 </a:solidFill>
                 <a:latin typeface="맑은 고딕"/>
+                <a:ea typeface="맑은 고딕"/>
+                <a:cs typeface="맑은 고딕"/>
               </a:rPr>
               <a:t>가져오기 → 로그인, 그것으로 준비 끝</a:t>
             </a:r>
@@ -5454,6 +5460,8 @@
                   <a:srgbClr val="FFFFFF"/>
                 </a:solidFill>
                 <a:latin typeface="맑은 고딕"/>
+                <a:ea typeface="맑은 고딕"/>
+                <a:cs typeface="맑은 고딕"/>
               </a:rPr>
               <a:t>영남이공대학교 김지윤교수</a:t>
             </a:r>
@@ -5613,6 +5621,8 @@
                   <a:srgbClr val="14213D"/>
                 </a:solidFill>
                 <a:latin typeface="맑은 고딕"/>
+                <a:ea typeface="맑은 고딕"/>
+                <a:cs typeface="맑은 고딕"/>
               </a:rPr>
               <a:t>02</a:t>
             </a:r>
@@ -5648,6 +5658,8 @@
                   <a:srgbClr val="14B8A6"/>
                 </a:solidFill>
                 <a:latin typeface="맑은 고딕"/>
+                <a:ea typeface="맑은 고딕"/>
+                <a:cs typeface="맑은 고딕"/>
               </a:rPr>
               <a:t>PART 2 · 설치 실습</a:t>
             </a:r>
@@ -5683,6 +5695,8 @@
                   <a:srgbClr val="FFFFFF"/>
                 </a:solidFill>
                 <a:latin typeface="맑은 고딕"/>
+                <a:ea typeface="맑은 고딕"/>
+                <a:cs typeface="맑은 고딕"/>
               </a:rPr>
               <a:t>로그인 계정 정보</a:t>
             </a:r>
@@ -5722,6 +5736,8 @@
                   <a:srgbClr val="0D9488"/>
                 </a:solidFill>
                 <a:latin typeface="맑은 고딕"/>
+                <a:ea typeface="맑은 고딕"/>
+                <a:cs typeface="맑은 고딕"/>
               </a:rPr>
               <a:t>●  </a:t>
             </a:r>
@@ -5731,6 +5747,8 @@
                   <a:srgbClr val="222733"/>
                 </a:solidFill>
                 <a:latin typeface="맑은 고딕"/>
+                <a:ea typeface="맑은 고딕"/>
+                <a:cs typeface="맑은 고딕"/>
               </a:rPr>
               <a:t>아이디: student</a:t>
             </a:r>
@@ -5747,6 +5765,8 @@
                   <a:srgbClr val="0D9488"/>
                 </a:solidFill>
                 <a:latin typeface="맑은 고딕"/>
+                <a:ea typeface="맑은 고딕"/>
+                <a:cs typeface="맑은 고딕"/>
               </a:rPr>
               <a:t>●  </a:t>
             </a:r>
@@ -5756,6 +5776,8 @@
                   <a:srgbClr val="222733"/>
                 </a:solidFill>
                 <a:latin typeface="맑은 고딕"/>
+                <a:ea typeface="맑은 고딕"/>
+                <a:cs typeface="맑은 고딕"/>
               </a:rPr>
               <a:t>비밀번호: a1234</a:t>
             </a:r>
@@ -5772,6 +5794,8 @@
                   <a:srgbClr val="0D9488"/>
                 </a:solidFill>
                 <a:latin typeface="맑은 고딕"/>
+                <a:ea typeface="맑은 고딕"/>
+                <a:cs typeface="맑은 고딕"/>
               </a:rPr>
               <a:t>●  </a:t>
             </a:r>
@@ -5781,6 +5805,8 @@
                   <a:srgbClr val="222733"/>
                 </a:solidFill>
                 <a:latin typeface="맑은 고딕"/>
+                <a:ea typeface="맑은 고딕"/>
+                <a:cs typeface="맑은 고딕"/>
               </a:rPr>
               <a:t>비밀번호 입력 시 화면에 아무것도 표시되지 않는 것이 정상입니다 (리눅스 터미널 보안 관례)</a:t>
             </a:r>
@@ -5860,6 +5886,8 @@
                   <a:srgbClr val="FFFFFF"/>
                 </a:solidFill>
                 <a:latin typeface="맑은 고딕"/>
+                <a:ea typeface="맑은 고딕"/>
+                <a:cs typeface="맑은 고딕"/>
               </a:rPr>
               <a:t>⚠  sudo 비밀번호 안내</a:t>
             </a:r>
@@ -5895,6 +5923,8 @@
                   <a:srgbClr val="FFFFFF"/>
                 </a:solidFill>
                 <a:latin typeface="맑은 고딕"/>
+                <a:ea typeface="맑은 고딕"/>
+                <a:cs typeface="맑은 고딕"/>
               </a:rPr>
               <a:t>이후 실습에서 sudo 명령을 쓸 때도 동일하게 a1234를 입력하면 됩니다</a:t>
             </a:r>
@@ -5930,6 +5960,8 @@
                   <a:srgbClr val="5B6373"/>
                 </a:solidFill>
                 <a:latin typeface="맑은 고딕"/>
+                <a:ea typeface="맑은 고딕"/>
+                <a:cs typeface="맑은 고딕"/>
               </a:rPr>
               <a:t>클라우드인프라관리  ·  0주차 오리엔테이션</a:t>
             </a:r>
@@ -5965,6 +5997,8 @@
                   <a:srgbClr val="5B6373"/>
                 </a:solidFill>
                 <a:latin typeface="맑은 고딕"/>
+                <a:ea typeface="맑은 고딕"/>
+                <a:cs typeface="맑은 고딕"/>
               </a:rPr>
               <a:t>10 / 16</a:t>
             </a:r>
@@ -6168,6 +6202,8 @@
                   <a:srgbClr val="14213D"/>
                 </a:solidFill>
                 <a:latin typeface="맑은 고딕"/>
+                <a:ea typeface="맑은 고딕"/>
+                <a:cs typeface="맑은 고딕"/>
               </a:rPr>
               <a:t>PART 03</a:t>
             </a:r>
@@ -6203,6 +6239,8 @@
                   <a:srgbClr val="FFFFFF"/>
                 </a:solidFill>
                 <a:latin typeface="맑은 고딕"/>
+                <a:ea typeface="맑은 고딕"/>
+                <a:cs typeface="맑은 고딕"/>
               </a:rPr>
               <a:t>환경 검증</a:t>
             </a:r>
@@ -6238,6 +6276,8 @@
                   <a:srgbClr val="C9D3E6"/>
                 </a:solidFill>
                 <a:latin typeface="맑은 고딕"/>
+                <a:ea typeface="맑은 고딕"/>
+                <a:cs typeface="맑은 고딕"/>
               </a:rPr>
               <a:t>실습 준비가 끝났는지 직접 확인한다</a:t>
             </a:r>
@@ -6397,6 +6437,8 @@
                   <a:srgbClr val="14213D"/>
                 </a:solidFill>
                 <a:latin typeface="맑은 고딕"/>
+                <a:ea typeface="맑은 고딕"/>
+                <a:cs typeface="맑은 고딕"/>
               </a:rPr>
               <a:t>03</a:t>
             </a:r>
@@ -6432,6 +6474,8 @@
                   <a:srgbClr val="14B8A6"/>
                 </a:solidFill>
                 <a:latin typeface="맑은 고딕"/>
+                <a:ea typeface="맑은 고딕"/>
+                <a:cs typeface="맑은 고딕"/>
               </a:rPr>
               <a:t>PART 3 · 환경 검증</a:t>
             </a:r>
@@ -6467,6 +6511,8 @@
                   <a:srgbClr val="FFFFFF"/>
                 </a:solidFill>
                 <a:latin typeface="맑은 고딕"/>
+                <a:ea typeface="맑은 고딕"/>
+                <a:cs typeface="맑은 고딕"/>
               </a:rPr>
               <a:t>세 가지 명령어로 확인하기</a:t>
             </a:r>
@@ -6506,6 +6552,8 @@
                   <a:srgbClr val="0D9488"/>
                 </a:solidFill>
                 <a:latin typeface="맑은 고딕"/>
+                <a:ea typeface="맑은 고딕"/>
+                <a:cs typeface="맑은 고딕"/>
               </a:rPr>
               <a:t>●  </a:t>
             </a:r>
@@ -6515,6 +6563,8 @@
                   <a:srgbClr val="222733"/>
                 </a:solidFill>
                 <a:latin typeface="맑은 고딕"/>
+                <a:ea typeface="맑은 고딕"/>
+                <a:cs typeface="맑은 고딕"/>
               </a:rPr>
               <a:t>docker --version</a:t>
             </a:r>
@@ -6531,6 +6581,8 @@
                   <a:srgbClr val="0D9488"/>
                 </a:solidFill>
                 <a:latin typeface="맑은 고딕"/>
+                <a:ea typeface="맑은 고딕"/>
+                <a:cs typeface="맑은 고딕"/>
               </a:rPr>
               <a:t>●  </a:t>
             </a:r>
@@ -6540,6 +6592,8 @@
                   <a:srgbClr val="222733"/>
                 </a:solidFill>
                 <a:latin typeface="맑은 고딕"/>
+                <a:ea typeface="맑은 고딕"/>
+                <a:cs typeface="맑은 고딕"/>
               </a:rPr>
               <a:t>kubectl version --client</a:t>
             </a:r>
@@ -6556,6 +6610,8 @@
                   <a:srgbClr val="0D9488"/>
                 </a:solidFill>
                 <a:latin typeface="맑은 고딕"/>
+                <a:ea typeface="맑은 고딕"/>
+                <a:cs typeface="맑은 고딕"/>
               </a:rPr>
               <a:t>●  </a:t>
             </a:r>
@@ -6565,6 +6621,8 @@
                   <a:srgbClr val="222733"/>
                 </a:solidFill>
                 <a:latin typeface="맑은 고딕"/>
+                <a:ea typeface="맑은 고딕"/>
+                <a:cs typeface="맑은 고딕"/>
               </a:rPr>
               <a:t>minikube status</a:t>
             </a:r>
@@ -6581,6 +6639,8 @@
                   <a:srgbClr val="0D9488"/>
                 </a:solidFill>
                 <a:latin typeface="맑은 고딕"/>
+                <a:ea typeface="맑은 고딕"/>
+                <a:cs typeface="맑은 고딕"/>
               </a:rPr>
               <a:t>●  </a:t>
             </a:r>
@@ -6590,6 +6650,8 @@
                   <a:srgbClr val="222733"/>
                 </a:solidFill>
                 <a:latin typeface="맑은 고딕"/>
+                <a:ea typeface="맑은 고딕"/>
+                <a:cs typeface="맑은 고딕"/>
               </a:rPr>
               <a:t>세 명령어 모두 오류 없이 버전/상태 정보가 출력되면 준비 완료</a:t>
             </a:r>
@@ -6625,6 +6687,8 @@
                   <a:srgbClr val="5B6373"/>
                 </a:solidFill>
                 <a:latin typeface="맑은 고딕"/>
+                <a:ea typeface="맑은 고딕"/>
+                <a:cs typeface="맑은 고딕"/>
               </a:rPr>
               <a:t>클라우드인프라관리  ·  0주차 오리엔테이션</a:t>
             </a:r>
@@ -6660,6 +6724,8 @@
                   <a:srgbClr val="5B6373"/>
                 </a:solidFill>
                 <a:latin typeface="맑은 고딕"/>
+                <a:ea typeface="맑은 고딕"/>
+                <a:cs typeface="맑은 고딕"/>
               </a:rPr>
               <a:t>12 / 16</a:t>
             </a:r>
@@ -6863,6 +6929,8 @@
                   <a:srgbClr val="14213D"/>
                 </a:solidFill>
                 <a:latin typeface="맑은 고딕"/>
+                <a:ea typeface="맑은 고딕"/>
+                <a:cs typeface="맑은 고딕"/>
               </a:rPr>
               <a:t>04</a:t>
             </a:r>
@@ -6898,6 +6966,8 @@
                   <a:srgbClr val="14B8A6"/>
                 </a:solidFill>
                 <a:latin typeface="맑은 고딕"/>
+                <a:ea typeface="맑은 고딕"/>
+                <a:cs typeface="맑은 고딕"/>
               </a:rPr>
               <a:t>PART 4 · 학기 중 필요한 계정</a:t>
             </a:r>
@@ -6933,6 +7003,8 @@
                   <a:srgbClr val="FFFFFF"/>
                 </a:solidFill>
                 <a:latin typeface="맑은 고딕"/>
+                <a:ea typeface="맑은 고딕"/>
+                <a:cs typeface="맑은 고딕"/>
               </a:rPr>
               <a:t>학기 중 이런 계정을 만들게 됩니다</a:t>
             </a:r>
@@ -6972,6 +7044,8 @@
                   <a:srgbClr val="0D9488"/>
                 </a:solidFill>
                 <a:latin typeface="맑은 고딕"/>
+                <a:ea typeface="맑은 고딕"/>
+                <a:cs typeface="맑은 고딕"/>
               </a:rPr>
               <a:t>●  </a:t>
             </a:r>
@@ -6981,6 +7055,8 @@
                   <a:srgbClr val="222733"/>
                 </a:solidFill>
                 <a:latin typeface="맑은 고딕"/>
+                <a:ea typeface="맑은 고딕"/>
+                <a:cs typeface="맑은 고딕"/>
               </a:rPr>
               <a:t>GitHub — 3주차 2차시에 가입 (소스 코드 저장용, 9~13주차까지 계속 재사용)</a:t>
             </a:r>
@@ -6997,6 +7073,8 @@
                   <a:srgbClr val="0D9488"/>
                 </a:solidFill>
                 <a:latin typeface="맑은 고딕"/>
+                <a:ea typeface="맑은 고딕"/>
+                <a:cs typeface="맑은 고딕"/>
               </a:rPr>
               <a:t>●  </a:t>
             </a:r>
@@ -7006,6 +7084,8 @@
                   <a:srgbClr val="222733"/>
                 </a:solidFill>
                 <a:latin typeface="맑은 고딕"/>
+                <a:ea typeface="맑은 고딕"/>
+                <a:cs typeface="맑은 고딕"/>
               </a:rPr>
               <a:t>Docker Hub — 3주차 2차시에 가입 (이미지 push/pull용, 13주차 파이프라인에서도 재사용)</a:t>
             </a:r>
@@ -7022,6 +7102,8 @@
                   <a:srgbClr val="0D9488"/>
                 </a:solidFill>
                 <a:latin typeface="맑은 고딕"/>
+                <a:ea typeface="맑은 고딕"/>
+                <a:cs typeface="맑은 고딕"/>
               </a:rPr>
               <a:t>●  </a:t>
             </a:r>
@@ -7031,6 +7113,8 @@
                   <a:srgbClr val="222733"/>
                 </a:solidFill>
                 <a:latin typeface="맑은 고딕"/>
+                <a:ea typeface="맑은 고딕"/>
+                <a:cs typeface="맑은 고딕"/>
               </a:rPr>
               <a:t>Terraform Cloud — 10주차 2차시에 가입 (원격 State 관리용, GitHub 계정으로 가입하면 편함)</a:t>
             </a:r>
@@ -7110,6 +7194,8 @@
                   <a:srgbClr val="FFFFFF"/>
                 </a:solidFill>
                 <a:latin typeface="맑은 고딕"/>
+                <a:ea typeface="맑은 고딕"/>
+                <a:cs typeface="맑은 고딕"/>
               </a:rPr>
               <a:t>💡  미리 알아두면 좋은 것</a:t>
             </a:r>
@@ -7145,6 +7231,8 @@
                   <a:srgbClr val="FFFFFF"/>
                 </a:solidFill>
                 <a:latin typeface="맑은 고딕"/>
+                <a:ea typeface="맑은 고딕"/>
+                <a:cs typeface="맑은 고딕"/>
               </a:rPr>
               <a:t>세 서비스를 동일한 이메일로 가입해두면 관리가 편합니다. Killercoda는 가입이 필요 없습니다 — 매 차시 제공되는 링크만 클릭하면 바로 실습할 수 있습니다.</a:t>
             </a:r>
@@ -7180,6 +7268,8 @@
                   <a:srgbClr val="5B6373"/>
                 </a:solidFill>
                 <a:latin typeface="맑은 고딕"/>
+                <a:ea typeface="맑은 고딕"/>
+                <a:cs typeface="맑은 고딕"/>
               </a:rPr>
               <a:t>클라우드인프라관리  ·  0주차 오리엔테이션</a:t>
             </a:r>
@@ -7215,6 +7305,8 @@
                   <a:srgbClr val="5B6373"/>
                 </a:solidFill>
                 <a:latin typeface="맑은 고딕"/>
+                <a:ea typeface="맑은 고딕"/>
+                <a:cs typeface="맑은 고딕"/>
               </a:rPr>
               <a:t>13 / 16</a:t>
             </a:r>
@@ -7418,6 +7510,8 @@
                   <a:srgbClr val="14213D"/>
                 </a:solidFill>
                 <a:latin typeface="맑은 고딕"/>
+                <a:ea typeface="맑은 고딕"/>
+                <a:cs typeface="맑은 고딕"/>
               </a:rPr>
               <a:t>05</a:t>
             </a:r>
@@ -7453,6 +7547,8 @@
                   <a:srgbClr val="14B8A6"/>
                 </a:solidFill>
                 <a:latin typeface="맑은 고딕"/>
+                <a:ea typeface="맑은 고딕"/>
+                <a:cs typeface="맑은 고딕"/>
               </a:rPr>
               <a:t>질의응답</a:t>
             </a:r>
@@ -7488,6 +7584,8 @@
                   <a:srgbClr val="FFFFFF"/>
                 </a:solidFill>
                 <a:latin typeface="맑은 고딕"/>
+                <a:ea typeface="맑은 고딕"/>
+                <a:cs typeface="맑은 고딕"/>
               </a:rPr>
               <a:t>자주 발생하는 문제와 해결</a:t>
             </a:r>
@@ -7527,6 +7625,8 @@
                   <a:srgbClr val="0D9488"/>
                 </a:solidFill>
                 <a:latin typeface="맑은 고딕"/>
+                <a:ea typeface="맑은 고딕"/>
+                <a:cs typeface="맑은 고딕"/>
               </a:rPr>
               <a:t>●  </a:t>
             </a:r>
@@ -7536,6 +7636,8 @@
                   <a:srgbClr val="222733"/>
                 </a:solidFill>
                 <a:latin typeface="맑은 고딕"/>
+                <a:ea typeface="맑은 고딕"/>
+                <a:cs typeface="맑은 고딕"/>
               </a:rPr>
               <a:t>VM이 켜지지 않는다 → BIOS에서 가상화(Intel VT-x/AMD-V) 옵션이 켜져 있는지 확인</a:t>
             </a:r>
@@ -7552,6 +7654,8 @@
                   <a:srgbClr val="0D9488"/>
                 </a:solidFill>
                 <a:latin typeface="맑은 고딕"/>
+                <a:ea typeface="맑은 고딕"/>
+                <a:cs typeface="맑은 고딕"/>
               </a:rPr>
               <a:t>●  </a:t>
             </a:r>
@@ -7561,6 +7665,8 @@
                   <a:srgbClr val="222733"/>
                 </a:solidFill>
                 <a:latin typeface="맑은 고딕"/>
+                <a:ea typeface="맑은 고딕"/>
+                <a:cs typeface="맑은 고딕"/>
               </a:rPr>
               <a:t>로그인이 안 된다 → 아이디/비밀번호는 student / a1234로 통일되어 있음</a:t>
             </a:r>
@@ -7577,6 +7683,8 @@
                   <a:srgbClr val="0D9488"/>
                 </a:solidFill>
                 <a:latin typeface="맑은 고딕"/>
+                <a:ea typeface="맑은 고딕"/>
+                <a:cs typeface="맑은 고딕"/>
               </a:rPr>
               <a:t>●  </a:t>
             </a:r>
@@ -7586,6 +7694,8 @@
                   <a:srgbClr val="222733"/>
                 </a:solidFill>
                 <a:latin typeface="맑은 고딕"/>
+                <a:ea typeface="맑은 고딕"/>
+                <a:cs typeface="맑은 고딕"/>
               </a:rPr>
               <a:t>그 외 문제 → LMS Q&amp;A 게시판에 캡처와 함께 남겨주세요</a:t>
             </a:r>
@@ -7621,6 +7731,8 @@
                   <a:srgbClr val="5B6373"/>
                 </a:solidFill>
                 <a:latin typeface="맑은 고딕"/>
+                <a:ea typeface="맑은 고딕"/>
+                <a:cs typeface="맑은 고딕"/>
               </a:rPr>
               <a:t>클라우드인프라관리  ·  0주차 오리엔테이션</a:t>
             </a:r>
@@ -7656,6 +7768,8 @@
                   <a:srgbClr val="5B6373"/>
                 </a:solidFill>
                 <a:latin typeface="맑은 고딕"/>
+                <a:ea typeface="맑은 고딕"/>
+                <a:cs typeface="맑은 고딕"/>
               </a:rPr>
               <a:t>14 / 16</a:t>
             </a:r>
@@ -7841,6 +7955,8 @@
                   <a:srgbClr val="FFFFFF"/>
                 </a:solidFill>
                 <a:latin typeface="맑은 고딕"/>
+                <a:ea typeface="맑은 고딕"/>
+                <a:cs typeface="맑은 고딕"/>
               </a:rPr>
               <a:t>오늘의 정리</a:t>
             </a:r>
@@ -7894,6 +8010,8 @@
                   <a:srgbClr val="14213D"/>
                 </a:solidFill>
                 <a:latin typeface="맑은 고딕"/>
+                <a:ea typeface="맑은 고딕"/>
+                <a:cs typeface="맑은 고딕"/>
               </a:rPr>
               <a:t>1</a:t>
             </a:r>
@@ -7929,6 +8047,8 @@
                   <a:srgbClr val="FFFFFF"/>
                 </a:solidFill>
                 <a:latin typeface="맑은 고딕"/>
+                <a:ea typeface="맑은 고딕"/>
+                <a:cs typeface="맑은 고딕"/>
               </a:rPr>
               <a:t>이 VM 하나로 0주차부터 7주차까지 모든 실습을 진행한다</a:t>
             </a:r>
@@ -7982,6 +8102,8 @@
                   <a:srgbClr val="14213D"/>
                 </a:solidFill>
                 <a:latin typeface="맑은 고딕"/>
+                <a:ea typeface="맑은 고딕"/>
+                <a:cs typeface="맑은 고딕"/>
               </a:rPr>
               <a:t>2</a:t>
             </a:r>
@@ -8017,6 +8139,8 @@
                   <a:srgbClr val="FFFFFF"/>
                 </a:solidFill>
                 <a:latin typeface="맑은 고딕"/>
+                <a:ea typeface="맑은 고딕"/>
+                <a:cs typeface="맑은 고딕"/>
               </a:rPr>
               <a:t>docker --version / kubectl version --client / minikube status 세 명령어로 준비 상태를 확인한다</a:t>
             </a:r>
@@ -8158,6 +8282,8 @@
                   <a:srgbClr val="FFFFFF"/>
                 </a:solidFill>
                 <a:latin typeface="맑은 고딕"/>
+                <a:ea typeface="맑은 고딕"/>
+                <a:cs typeface="맑은 고딕"/>
               </a:rPr>
               <a:t>다음 주 예고</a:t>
             </a:r>
@@ -8193,6 +8319,8 @@
                   <a:srgbClr val="14B8A6"/>
                 </a:solidFill>
                 <a:latin typeface="맑은 고딕"/>
+                <a:ea typeface="맑은 고딕"/>
+                <a:cs typeface="맑은 고딕"/>
               </a:rPr>
               <a:t>다음 차시 예고 — 1주차 — 클라우드 개념과 Docker 입문</a:t>
             </a:r>
@@ -8228,6 +8356,8 @@
                   <a:srgbClr val="FFFFFF"/>
                 </a:solidFill>
                 <a:latin typeface="맑은 고딕"/>
+                <a:ea typeface="맑은 고딕"/>
+                <a:cs typeface="맑은 고딕"/>
               </a:rPr>
               <a:t>가상화와 클라우드 컴퓨팅의 기본 개념을 배우고, 오늘 준비한 VM에서 첫 컨테이너를 직접 실행해봅니다.</a:t>
             </a:r>
@@ -8413,6 +8543,8 @@
                   <a:srgbClr val="14B8A6"/>
                 </a:solidFill>
                 <a:latin typeface="맑은 고딕"/>
+                <a:ea typeface="맑은 고딕"/>
+                <a:cs typeface="맑은 고딕"/>
               </a:rPr>
               <a:t>0주차 오리엔테이션을 마치며</a:t>
             </a:r>
@@ -8448,6 +8580,8 @@
                   <a:srgbClr val="FFFFFF"/>
                 </a:solidFill>
                 <a:latin typeface="맑은 고딕"/>
+                <a:ea typeface="맑은 고딕"/>
+                <a:cs typeface="맑은 고딕"/>
               </a:rPr>
               <a:t>수고하셨습니다!</a:t>
             </a:r>
@@ -8487,6 +8621,8 @@
                   <a:srgbClr val="C9D3E6"/>
                 </a:solidFill>
                 <a:latin typeface="맑은 고딕"/>
+                <a:ea typeface="맑은 고딕"/>
+                <a:cs typeface="맑은 고딕"/>
               </a:rPr>
               <a:t>이제 실습 환경 걱정은 끝났습니다. 다음 시간부터 본격적으로 클라우드와 Docker를 직접 다뤄보겠습니다.</a:t>
             </a:r>
@@ -8628,6 +8764,8 @@
                   <a:srgbClr val="14B8A6"/>
                 </a:solidFill>
                 <a:latin typeface="맑은 고딕"/>
+                <a:ea typeface="맑은 고딕"/>
+                <a:cs typeface="맑은 고딕"/>
               </a:rPr>
               <a:t>SESSION OVERVIEW</a:t>
             </a:r>
@@ -8663,6 +8801,8 @@
                   <a:srgbClr val="FFFFFF"/>
                 </a:solidFill>
                 <a:latin typeface="맑은 고딕"/>
+                <a:ea typeface="맑은 고딕"/>
+                <a:cs typeface="맑은 고딕"/>
               </a:rPr>
               <a:t>오늘의 학습 목표</a:t>
             </a:r>
@@ -8702,6 +8842,8 @@
                   <a:srgbClr val="222733"/>
                 </a:solidFill>
                 <a:latin typeface="맑은 고딕"/>
+                <a:ea typeface="맑은 고딕"/>
+                <a:cs typeface="맑은 고딕"/>
               </a:rPr>
               <a:t>1.  이 강좌가 왜 VM을 통째로 배포하는지 이해한다</a:t>
             </a:r>
@@ -8718,6 +8860,8 @@
                   <a:srgbClr val="222733"/>
                 </a:solidFill>
                 <a:latin typeface="맑은 고딕"/>
+                <a:ea typeface="맑은 고딕"/>
+                <a:cs typeface="맑은 고딕"/>
               </a:rPr>
               <a:t>2.  VMware Workstation Player로 VM을 여는 방법을 익힌다</a:t>
             </a:r>
@@ -8734,6 +8878,8 @@
                   <a:srgbClr val="222733"/>
                 </a:solidFill>
                 <a:latin typeface="맑은 고딕"/>
+                <a:ea typeface="맑은 고딕"/>
+                <a:cs typeface="맑은 고딕"/>
               </a:rPr>
               <a:t>3.  VM에 로그인하고 실습 환경이 정상인지 직접 확인한다</a:t>
             </a:r>
@@ -8750,6 +8896,8 @@
                   <a:srgbClr val="222733"/>
                 </a:solidFill>
                 <a:latin typeface="맑은 고딕"/>
+                <a:ea typeface="맑은 고딕"/>
+                <a:cs typeface="맑은 고딕"/>
               </a:rPr>
               <a:t>4.  학기 중 어떤 계정을 언제 만들게 되는지 미리 파악한다</a:t>
             </a:r>
@@ -8785,6 +8933,8 @@
                   <a:srgbClr val="5B6373"/>
                 </a:solidFill>
                 <a:latin typeface="맑은 고딕"/>
+                <a:ea typeface="맑은 고딕"/>
+                <a:cs typeface="맑은 고딕"/>
               </a:rPr>
               <a:t>클라우드인프라관리  ·  0주차 오리엔테이션</a:t>
             </a:r>
@@ -8820,6 +8970,8 @@
                   <a:srgbClr val="5B6373"/>
                 </a:solidFill>
                 <a:latin typeface="맑은 고딕"/>
+                <a:ea typeface="맑은 고딕"/>
+                <a:cs typeface="맑은 고딕"/>
               </a:rPr>
               <a:t>02 / 16</a:t>
             </a:r>
@@ -9005,6 +9157,8 @@
                   <a:srgbClr val="14B8A6"/>
                 </a:solidFill>
                 <a:latin typeface="맑은 고딕"/>
+                <a:ea typeface="맑은 고딕"/>
+                <a:cs typeface="맑은 고딕"/>
               </a:rPr>
               <a:t>SESSION OVERVIEW</a:t>
             </a:r>
@@ -9040,6 +9194,8 @@
                   <a:srgbClr val="FFFFFF"/>
                 </a:solidFill>
                 <a:latin typeface="맑은 고딕"/>
+                <a:ea typeface="맑은 고딕"/>
+                <a:cs typeface="맑은 고딕"/>
               </a:rPr>
               <a:t>오늘의 진행 순서</a:t>
             </a:r>
@@ -9251,6 +9407,8 @@
                   <a:srgbClr val="FFFFFF"/>
                 </a:solidFill>
                 <a:latin typeface="맑은 고딕"/>
+                <a:ea typeface="맑은 고딕"/>
+                <a:cs typeface="맑은 고딕"/>
               </a:rPr>
               <a:t>1</a:t>
             </a:r>
@@ -9334,6 +9492,8 @@
                   <a:srgbClr val="14213D"/>
                 </a:solidFill>
                 <a:latin typeface="맑은 고딕"/>
+                <a:ea typeface="맑은 고딕"/>
+                <a:cs typeface="맑은 고딕"/>
               </a:rPr>
               <a:t>배경 설명</a:t>
             </a:r>
@@ -9373,6 +9533,8 @@
                   <a:srgbClr val="222733"/>
                 </a:solidFill>
                 <a:latin typeface="맑은 고딕"/>
+                <a:ea typeface="맑은 고딕"/>
+                <a:cs typeface="맑은 고딕"/>
               </a:rPr>
               <a:t>왜 VM을 통째로 주는가</a:t>
             </a:r>
@@ -9452,6 +9614,8 @@
                   <a:srgbClr val="FFFFFF"/>
                 </a:solidFill>
                 <a:latin typeface="맑은 고딕"/>
+                <a:ea typeface="맑은 고딕"/>
+                <a:cs typeface="맑은 고딕"/>
               </a:rPr>
               <a:t>2</a:t>
             </a:r>
@@ -9535,6 +9699,8 @@
                   <a:srgbClr val="14213D"/>
                 </a:solidFill>
                 <a:latin typeface="맑은 고딕"/>
+                <a:ea typeface="맑은 고딕"/>
+                <a:cs typeface="맑은 고딕"/>
               </a:rPr>
               <a:t>설치 실습</a:t>
             </a:r>
@@ -9574,6 +9740,8 @@
                   <a:srgbClr val="222733"/>
                 </a:solidFill>
                 <a:latin typeface="맑은 고딕"/>
+                <a:ea typeface="맑은 고딕"/>
+                <a:cs typeface="맑은 고딕"/>
               </a:rPr>
               <a:t>VMware+VM 실행·로그인</a:t>
             </a:r>
@@ -9653,6 +9821,8 @@
                   <a:srgbClr val="FFFFFF"/>
                 </a:solidFill>
                 <a:latin typeface="맑은 고딕"/>
+                <a:ea typeface="맑은 고딕"/>
+                <a:cs typeface="맑은 고딕"/>
               </a:rPr>
               <a:t>3</a:t>
             </a:r>
@@ -9736,6 +9906,8 @@
                   <a:srgbClr val="14213D"/>
                 </a:solidFill>
                 <a:latin typeface="맑은 고딕"/>
+                <a:ea typeface="맑은 고딕"/>
+                <a:cs typeface="맑은 고딕"/>
               </a:rPr>
               <a:t>환경 검증</a:t>
             </a:r>
@@ -9775,6 +9947,8 @@
                   <a:srgbClr val="222733"/>
                 </a:solidFill>
                 <a:latin typeface="맑은 고딕"/>
+                <a:ea typeface="맑은 고딕"/>
+                <a:cs typeface="맑은 고딕"/>
               </a:rPr>
               <a:t>환경 확인 + 학기 계정 안내</a:t>
             </a:r>
@@ -9854,6 +10028,8 @@
                   <a:srgbClr val="FFFFFF"/>
                 </a:solidFill>
                 <a:latin typeface="맑은 고딕"/>
+                <a:ea typeface="맑은 고딕"/>
+                <a:cs typeface="맑은 고딕"/>
               </a:rPr>
               <a:t>4</a:t>
             </a:r>
@@ -9937,6 +10113,8 @@
                   <a:srgbClr val="14213D"/>
                 </a:solidFill>
                 <a:latin typeface="맑은 고딕"/>
+                <a:ea typeface="맑은 고딕"/>
+                <a:cs typeface="맑은 고딕"/>
               </a:rPr>
               <a:t>질의응답</a:t>
             </a:r>
@@ -9976,6 +10154,8 @@
                   <a:srgbClr val="222733"/>
                 </a:solidFill>
                 <a:latin typeface="맑은 고딕"/>
+                <a:ea typeface="맑은 고딕"/>
+                <a:cs typeface="맑은 고딕"/>
               </a:rPr>
               <a:t>트러블슈팅 안내</a:t>
             </a:r>
@@ -10011,6 +10191,8 @@
                   <a:srgbClr val="5B6373"/>
                 </a:solidFill>
                 <a:latin typeface="맑은 고딕"/>
+                <a:ea typeface="맑은 고딕"/>
+                <a:cs typeface="맑은 고딕"/>
               </a:rPr>
               <a:t>클라우드인프라관리  ·  0주차 오리엔테이션</a:t>
             </a:r>
@@ -10046,6 +10228,8 @@
                   <a:srgbClr val="5B6373"/>
                 </a:solidFill>
                 <a:latin typeface="맑은 고딕"/>
+                <a:ea typeface="맑은 고딕"/>
+                <a:cs typeface="맑은 고딕"/>
               </a:rPr>
               <a:t>03 / 16</a:t>
             </a:r>
@@ -10249,6 +10433,8 @@
                   <a:srgbClr val="14213D"/>
                 </a:solidFill>
                 <a:latin typeface="맑은 고딕"/>
+                <a:ea typeface="맑은 고딕"/>
+                <a:cs typeface="맑은 고딕"/>
               </a:rPr>
               <a:t>PART 01</a:t>
             </a:r>
@@ -10284,6 +10470,8 @@
                   <a:srgbClr val="FFFFFF"/>
                 </a:solidFill>
                 <a:latin typeface="맑은 고딕"/>
+                <a:ea typeface="맑은 고딕"/>
+                <a:cs typeface="맑은 고딕"/>
               </a:rPr>
               <a:t>왜 VM을 통째로 배포하는가</a:t>
             </a:r>
@@ -10319,6 +10507,8 @@
                   <a:srgbClr val="C9D3E6"/>
                 </a:solidFill>
                 <a:latin typeface="맑은 고딕"/>
+                <a:ea typeface="맑은 고딕"/>
+                <a:cs typeface="맑은 고딕"/>
               </a:rPr>
               <a:t>설치 때문에 실습을 포기하지 않도록</a:t>
             </a:r>
@@ -10478,6 +10668,8 @@
                   <a:srgbClr val="14213D"/>
                 </a:solidFill>
                 <a:latin typeface="맑은 고딕"/>
+                <a:ea typeface="맑은 고딕"/>
+                <a:cs typeface="맑은 고딕"/>
               </a:rPr>
               <a:t>01</a:t>
             </a:r>
@@ -10513,6 +10705,8 @@
                   <a:srgbClr val="14B8A6"/>
                 </a:solidFill>
                 <a:latin typeface="맑은 고딕"/>
+                <a:ea typeface="맑은 고딕"/>
+                <a:cs typeface="맑은 고딕"/>
               </a:rPr>
               <a:t>PART 1 · 배경 설명</a:t>
             </a:r>
@@ -10548,6 +10742,8 @@
                   <a:srgbClr val="FFFFFF"/>
                 </a:solidFill>
                 <a:latin typeface="맑은 고딕"/>
+                <a:ea typeface="맑은 고딕"/>
+                <a:cs typeface="맑은 고딕"/>
               </a:rPr>
               <a:t>클라우드·리눅스가 처음이어도 괜찮습니다</a:t>
             </a:r>
@@ -10587,6 +10783,8 @@
                   <a:srgbClr val="0D9488"/>
                 </a:solidFill>
                 <a:latin typeface="맑은 고딕"/>
+                <a:ea typeface="맑은 고딕"/>
+                <a:cs typeface="맑은 고딕"/>
               </a:rPr>
               <a:t>●  </a:t>
             </a:r>
@@ -10596,6 +10794,8 @@
                   <a:srgbClr val="222733"/>
                 </a:solidFill>
                 <a:latin typeface="맑은 고딕"/>
+                <a:ea typeface="맑은 고딕"/>
+                <a:cs typeface="맑은 고딕"/>
               </a:rPr>
               <a:t>이 강좌는 Docker, Kubernetes 실습이 핵심 — 그런데 설치 자체가 큰 장벽이 될 수 있음</a:t>
             </a:r>
@@ -10612,6 +10812,8 @@
                   <a:srgbClr val="0D9488"/>
                 </a:solidFill>
                 <a:latin typeface="맑은 고딕"/>
+                <a:ea typeface="맑은 고딕"/>
+                <a:cs typeface="맑은 고딕"/>
               </a:rPr>
               <a:t>●  </a:t>
             </a:r>
@@ -10621,6 +10823,8 @@
                   <a:srgbClr val="222733"/>
                 </a:solidFill>
                 <a:latin typeface="맑은 고딕"/>
+                <a:ea typeface="맑은 고딕"/>
+                <a:cs typeface="맑은 고딕"/>
               </a:rPr>
               <a:t>Windows에 Docker·리눅스 환경을 직접 설치하려면 WSL2, 가상화 설정 등 사전 지식이 많이 필요함</a:t>
             </a:r>
@@ -10637,6 +10841,8 @@
                   <a:srgbClr val="0D9488"/>
                 </a:solidFill>
                 <a:latin typeface="맑은 고딕"/>
+                <a:ea typeface="맑은 고딕"/>
+                <a:cs typeface="맑은 고딕"/>
               </a:rPr>
               <a:t>●  </a:t>
             </a:r>
@@ -10646,6 +10852,8 @@
                   <a:srgbClr val="222733"/>
                 </a:solidFill>
                 <a:latin typeface="맑은 고딕"/>
+                <a:ea typeface="맑은 고딕"/>
+                <a:cs typeface="맑은 고딕"/>
               </a:rPr>
               <a:t>그래서 교수자가 Docker·minikube·kubectl까지 전부 설치·초기화해 둔 VM 이미지를 통째로 배포함</a:t>
             </a:r>
@@ -10725,6 +10933,8 @@
                   <a:srgbClr val="FFFFFF"/>
                 </a:solidFill>
                 <a:latin typeface="맑은 고딕"/>
+                <a:ea typeface="맑은 고딕"/>
+                <a:cs typeface="맑은 고딕"/>
               </a:rPr>
               <a:t>🎯  여러분이 할 일은 단 두 가지</a:t>
             </a:r>
@@ -10760,6 +10970,8 @@
                   <a:srgbClr val="FFFFFF"/>
                 </a:solidFill>
                 <a:latin typeface="맑은 고딕"/>
+                <a:ea typeface="맑은 고딕"/>
+                <a:cs typeface="맑은 고딕"/>
               </a:rPr>
               <a:t>① VM 파일을 받아서 연다  ② student 계정으로 로그인한다 — 그걸로 끝입니다</a:t>
             </a:r>
@@ -10795,6 +11007,8 @@
                   <a:srgbClr val="5B6373"/>
                 </a:solidFill>
                 <a:latin typeface="맑은 고딕"/>
+                <a:ea typeface="맑은 고딕"/>
+                <a:cs typeface="맑은 고딕"/>
               </a:rPr>
               <a:t>클라우드인프라관리  ·  0주차 오리엔테이션</a:t>
             </a:r>
@@ -10830,6 +11044,8 @@
                   <a:srgbClr val="5B6373"/>
                 </a:solidFill>
                 <a:latin typeface="맑은 고딕"/>
+                <a:ea typeface="맑은 고딕"/>
+                <a:cs typeface="맑은 고딕"/>
               </a:rPr>
               <a:t>05 / 16</a:t>
             </a:r>
@@ -11033,6 +11249,8 @@
                   <a:srgbClr val="14213D"/>
                 </a:solidFill>
                 <a:latin typeface="맑은 고딕"/>
+                <a:ea typeface="맑은 고딕"/>
+                <a:cs typeface="맑은 고딕"/>
               </a:rPr>
               <a:t>01</a:t>
             </a:r>
@@ -11068,6 +11286,8 @@
                   <a:srgbClr val="14B8A6"/>
                 </a:solidFill>
                 <a:latin typeface="맑은 고딕"/>
+                <a:ea typeface="맑은 고딕"/>
+                <a:cs typeface="맑은 고딕"/>
               </a:rPr>
               <a:t>PART 1 · 배경 설명</a:t>
             </a:r>
@@ -11103,6 +11323,8 @@
                   <a:srgbClr val="FFFFFF"/>
                 </a:solidFill>
                 <a:latin typeface="맑은 고딕"/>
+                <a:ea typeface="맑은 고딕"/>
+                <a:cs typeface="맑은 고딕"/>
               </a:rPr>
               <a:t>이 VM에 이미 준비되어 있는 것들</a:t>
             </a:r>
@@ -11182,6 +11404,8 @@
                   <a:srgbClr val="FFFFFF"/>
                 </a:solidFill>
                 <a:latin typeface="맑은 고딕"/>
+                <a:ea typeface="맑은 고딕"/>
+                <a:cs typeface="맑은 고딕"/>
               </a:rPr>
               <a:t>구분</a:t>
             </a:r>
@@ -11261,6 +11485,8 @@
                   <a:srgbClr val="FFFFFF"/>
                 </a:solidFill>
                 <a:latin typeface="맑은 고딕"/>
+                <a:ea typeface="맑은 고딕"/>
+                <a:cs typeface="맑은 고딕"/>
               </a:rPr>
               <a:t>내용</a:t>
             </a:r>
@@ -11340,6 +11566,8 @@
                   <a:srgbClr val="14213D"/>
                 </a:solidFill>
                 <a:latin typeface="맑은 고딕"/>
+                <a:ea typeface="맑은 고딕"/>
+                <a:cs typeface="맑은 고딕"/>
               </a:rPr>
               <a:t>OS</a:t>
             </a:r>
@@ -11419,6 +11647,8 @@
                   <a:srgbClr val="222733"/>
                 </a:solidFill>
                 <a:latin typeface="맑은 고딕"/>
+                <a:ea typeface="맑은 고딕"/>
+                <a:cs typeface="맑은 고딕"/>
               </a:rPr>
               <a:t>Ubuntu 24.04 LTS</a:t>
             </a:r>
@@ -11498,6 +11728,8 @@
                   <a:srgbClr val="14213D"/>
                 </a:solidFill>
                 <a:latin typeface="맑은 고딕"/>
+                <a:ea typeface="맑은 고딕"/>
+                <a:cs typeface="맑은 고딕"/>
               </a:rPr>
               <a:t>컨테이너</a:t>
             </a:r>
@@ -11577,6 +11809,8 @@
                   <a:srgbClr val="222733"/>
                 </a:solidFill>
                 <a:latin typeface="맑은 고딕"/>
+                <a:ea typeface="맑은 고딕"/>
+                <a:cs typeface="맑은 고딕"/>
               </a:rPr>
               <a:t>Docker + Docker Compose</a:t>
             </a:r>
@@ -11656,6 +11890,8 @@
                   <a:srgbClr val="14213D"/>
                 </a:solidFill>
                 <a:latin typeface="맑은 고딕"/>
+                <a:ea typeface="맑은 고딕"/>
+                <a:cs typeface="맑은 고딕"/>
               </a:rPr>
               <a:t>오케스트레이션</a:t>
             </a:r>
@@ -11735,6 +11971,8 @@
                   <a:srgbClr val="222733"/>
                 </a:solidFill>
                 <a:latin typeface="맑은 고딕"/>
+                <a:ea typeface="맑은 고딕"/>
+                <a:cs typeface="맑은 고딕"/>
               </a:rPr>
               <a:t>minikube, kubectl (1~7주차 실습 전체 대응)</a:t>
             </a:r>
@@ -11814,6 +12052,8 @@
                   <a:srgbClr val="14213D"/>
                 </a:solidFill>
                 <a:latin typeface="맑은 고딕"/>
+                <a:ea typeface="맑은 고딕"/>
+                <a:cs typeface="맑은 고딕"/>
               </a:rPr>
               <a:t>기본 도구</a:t>
             </a:r>
@@ -11893,6 +12133,8 @@
                   <a:srgbClr val="222733"/>
                 </a:solidFill>
                 <a:latin typeface="맑은 고딕"/>
+                <a:ea typeface="맑은 고딕"/>
+                <a:cs typeface="맑은 고딕"/>
               </a:rPr>
               <a:t>git, curl, vim, nano, htop</a:t>
             </a:r>
@@ -11928,6 +12170,8 @@
                   <a:srgbClr val="5B6373"/>
                 </a:solidFill>
                 <a:latin typeface="맑은 고딕"/>
+                <a:ea typeface="맑은 고딕"/>
+                <a:cs typeface="맑은 고딕"/>
               </a:rPr>
               <a:t>클라우드인프라관리  ·  0주차 오리엔테이션</a:t>
             </a:r>
@@ -11963,6 +12207,8 @@
                   <a:srgbClr val="5B6373"/>
                 </a:solidFill>
                 <a:latin typeface="맑은 고딕"/>
+                <a:ea typeface="맑은 고딕"/>
+                <a:cs typeface="맑은 고딕"/>
               </a:rPr>
               <a:t>06 / 16</a:t>
             </a:r>
@@ -12166,6 +12412,8 @@
                   <a:srgbClr val="14213D"/>
                 </a:solidFill>
                 <a:latin typeface="맑은 고딕"/>
+                <a:ea typeface="맑은 고딕"/>
+                <a:cs typeface="맑은 고딕"/>
               </a:rPr>
               <a:t>PART 02</a:t>
             </a:r>
@@ -12201,6 +12449,8 @@
                   <a:srgbClr val="FFFFFF"/>
                 </a:solidFill>
                 <a:latin typeface="맑은 고딕"/>
+                <a:ea typeface="맑은 고딕"/>
+                <a:cs typeface="맑은 고딕"/>
               </a:rPr>
               <a:t>VM 설치 실습</a:t>
             </a:r>
@@ -12236,6 +12486,8 @@
                   <a:srgbClr val="C9D3E6"/>
                 </a:solidFill>
                 <a:latin typeface="맑은 고딕"/>
+                <a:ea typeface="맑은 고딕"/>
+                <a:cs typeface="맑은 고딕"/>
               </a:rPr>
               <a:t>가져오기 → 로그인</a:t>
             </a:r>
@@ -12395,6 +12647,8 @@
                   <a:srgbClr val="14213D"/>
                 </a:solidFill>
                 <a:latin typeface="맑은 고딕"/>
+                <a:ea typeface="맑은 고딕"/>
+                <a:cs typeface="맑은 고딕"/>
               </a:rPr>
               <a:t>02</a:t>
             </a:r>
@@ -12430,6 +12684,8 @@
                   <a:srgbClr val="14B8A6"/>
                 </a:solidFill>
                 <a:latin typeface="맑은 고딕"/>
+                <a:ea typeface="맑은 고딕"/>
+                <a:cs typeface="맑은 고딕"/>
               </a:rPr>
               <a:t>PART 2 · 설치 실습</a:t>
             </a:r>
@@ -12465,6 +12721,8 @@
                   <a:srgbClr val="FFFFFF"/>
                 </a:solidFill>
                 <a:latin typeface="맑은 고딕"/>
+                <a:ea typeface="맑은 고딕"/>
+                <a:cs typeface="맑은 고딕"/>
               </a:rPr>
               <a:t>준비물</a:t>
             </a:r>
@@ -12504,6 +12762,8 @@
                   <a:srgbClr val="0D9488"/>
                 </a:solidFill>
                 <a:latin typeface="맑은 고딕"/>
+                <a:ea typeface="맑은 고딕"/>
+                <a:cs typeface="맑은 고딕"/>
               </a:rPr>
               <a:t>●  </a:t>
             </a:r>
@@ -12513,6 +12773,8 @@
                   <a:srgbClr val="222733"/>
                 </a:solidFill>
                 <a:latin typeface="맑은 고딕"/>
+                <a:ea typeface="맑은 고딕"/>
+                <a:cs typeface="맑은 고딕"/>
               </a:rPr>
               <a:t>Windows PC (디스크 여유 공간 15GB 이상, RAM 8GB 이상 권장)</a:t>
             </a:r>
@@ -12529,6 +12791,8 @@
                   <a:srgbClr val="0D9488"/>
                 </a:solidFill>
                 <a:latin typeface="맑은 고딕"/>
+                <a:ea typeface="맑은 고딕"/>
+                <a:cs typeface="맑은 고딕"/>
               </a:rPr>
               <a:t>●  </a:t>
             </a:r>
@@ -12538,6 +12802,8 @@
                   <a:srgbClr val="222733"/>
                 </a:solidFill>
                 <a:latin typeface="맑은 고딕"/>
+                <a:ea typeface="맑은 고딕"/>
+                <a:cs typeface="맑은 고딕"/>
               </a:rPr>
               <a:t>LMS에서 받은 cloud-lab-vm.zip 파일</a:t>
             </a:r>
@@ -12554,6 +12820,8 @@
                   <a:srgbClr val="0D9488"/>
                 </a:solidFill>
                 <a:latin typeface="맑은 고딕"/>
+                <a:ea typeface="맑은 고딕"/>
+                <a:cs typeface="맑은 고딕"/>
               </a:rPr>
               <a:t>●  </a:t>
             </a:r>
@@ -12563,6 +12831,8 @@
                   <a:srgbClr val="222733"/>
                 </a:solidFill>
                 <a:latin typeface="맑은 고딕"/>
+                <a:ea typeface="맑은 고딕"/>
+                <a:cs typeface="맑은 고딕"/>
               </a:rPr>
               <a:t>VMware Workstation Player (무료, 공식 홈페이지에서 설치)</a:t>
             </a:r>
@@ -12598,6 +12868,8 @@
                   <a:srgbClr val="5B6373"/>
                 </a:solidFill>
                 <a:latin typeface="맑은 고딕"/>
+                <a:ea typeface="맑은 고딕"/>
+                <a:cs typeface="맑은 고딕"/>
               </a:rPr>
               <a:t>클라우드인프라관리  ·  0주차 오리엔테이션</a:t>
             </a:r>
@@ -12633,6 +12905,8 @@
                   <a:srgbClr val="5B6373"/>
                 </a:solidFill>
                 <a:latin typeface="맑은 고딕"/>
+                <a:ea typeface="맑은 고딕"/>
+                <a:cs typeface="맑은 고딕"/>
               </a:rPr>
               <a:t>08 / 16</a:t>
             </a:r>
@@ -12836,6 +13110,8 @@
                   <a:srgbClr val="14213D"/>
                 </a:solidFill>
                 <a:latin typeface="맑은 고딕"/>
+                <a:ea typeface="맑은 고딕"/>
+                <a:cs typeface="맑은 고딕"/>
               </a:rPr>
               <a:t>02</a:t>
             </a:r>
@@ -12871,6 +13147,8 @@
                   <a:srgbClr val="14B8A6"/>
                 </a:solidFill>
                 <a:latin typeface="맑은 고딕"/>
+                <a:ea typeface="맑은 고딕"/>
+                <a:cs typeface="맑은 고딕"/>
               </a:rPr>
               <a:t>PART 2 · 설치 실습</a:t>
             </a:r>
@@ -12906,6 +13184,8 @@
                   <a:srgbClr val="FFFFFF"/>
                 </a:solidFill>
                 <a:latin typeface="맑은 고딕"/>
+                <a:ea typeface="맑은 고딕"/>
+                <a:cs typeface="맑은 고딕"/>
               </a:rPr>
               <a:t>설치 순서 5단계</a:t>
             </a:r>
@@ -12945,6 +13225,8 @@
                   <a:srgbClr val="222733"/>
                 </a:solidFill>
                 <a:latin typeface="맑은 고딕"/>
+                <a:ea typeface="맑은 고딕"/>
+                <a:cs typeface="맑은 고딕"/>
               </a:rPr>
               <a:t>① VMware Workstation Player 설치</a:t>
             </a:r>
@@ -12961,6 +13243,8 @@
                   <a:srgbClr val="222733"/>
                 </a:solidFill>
                 <a:latin typeface="맑은 고딕"/>
+                <a:ea typeface="맑은 고딕"/>
+                <a:cs typeface="맑은 고딕"/>
               </a:rPr>
               <a:t>② cloud-lab-vm.zip 압축 해제 (cloud-lab.vmx, cloud-lab.vmdk 생성)</a:t>
             </a:r>
@@ -12977,6 +13261,8 @@
                   <a:srgbClr val="222733"/>
                 </a:solidFill>
                 <a:latin typeface="맑은 고딕"/>
+                <a:ea typeface="맑은 고딕"/>
+                <a:cs typeface="맑은 고딕"/>
               </a:rPr>
               <a:t>③ VMware Player에서 Open a Virtual Machine → cloud-lab.vmx 선택</a:t>
             </a:r>
@@ -12993,6 +13279,8 @@
                   <a:srgbClr val="222733"/>
                 </a:solidFill>
                 <a:latin typeface="맑은 고딕"/>
+                <a:ea typeface="맑은 고딕"/>
+                <a:cs typeface="맑은 고딕"/>
               </a:rPr>
               <a:t>④ Play virtual machine 클릭 → 로그인 프롬프트 대기</a:t>
             </a:r>
@@ -13009,6 +13297,8 @@
                   <a:srgbClr val="222733"/>
                 </a:solidFill>
                 <a:latin typeface="맑은 고딕"/>
+                <a:ea typeface="맑은 고딕"/>
+                <a:cs typeface="맑은 고딕"/>
               </a:rPr>
               <a:t>⑤ student / a1234 로 로그인</a:t>
             </a:r>
@@ -13044,6 +13334,8 @@
                   <a:srgbClr val="14213D"/>
                 </a:solidFill>
                 <a:latin typeface="맑은 고딕"/>
+                <a:ea typeface="맑은 고딕"/>
+                <a:cs typeface="맑은 고딕"/>
               </a:rPr>
               <a:t>5단계 요약</a:t>
             </a:r>
@@ -13123,6 +13415,8 @@
                   <a:srgbClr val="FFFFFF"/>
                 </a:solidFill>
                 <a:latin typeface="맑은 고딕"/>
+                <a:ea typeface="맑은 고딕"/>
+                <a:cs typeface="맑은 고딕"/>
               </a:rPr>
               <a:t>① 설치</a:t>
             </a:r>
@@ -13202,6 +13496,8 @@
                   <a:srgbClr val="FFFFFF"/>
                 </a:solidFill>
                 <a:latin typeface="맑은 고딕"/>
+                <a:ea typeface="맑은 고딕"/>
+                <a:cs typeface="맑은 고딕"/>
               </a:rPr>
               <a:t>② 압축 해제</a:t>
             </a:r>
@@ -13281,6 +13577,8 @@
                   <a:srgbClr val="FFFFFF"/>
                 </a:solidFill>
                 <a:latin typeface="맑은 고딕"/>
+                <a:ea typeface="맑은 고딕"/>
+                <a:cs typeface="맑은 고딕"/>
               </a:rPr>
               <a:t>③ VM 열기</a:t>
             </a:r>
@@ -13360,6 +13658,8 @@
                   <a:srgbClr val="FFFFFF"/>
                 </a:solidFill>
                 <a:latin typeface="맑은 고딕"/>
+                <a:ea typeface="맑은 고딕"/>
+                <a:cs typeface="맑은 고딕"/>
               </a:rPr>
               <a:t>④ VM 실행</a:t>
             </a:r>
@@ -13439,6 +13739,8 @@
                   <a:srgbClr val="FFFFFF"/>
                 </a:solidFill>
                 <a:latin typeface="맑은 고딕"/>
+                <a:ea typeface="맑은 고딕"/>
+                <a:cs typeface="맑은 고딕"/>
               </a:rPr>
               <a:t>⑤ 로그인</a:t>
             </a:r>
@@ -13474,6 +13776,8 @@
                   <a:srgbClr val="5B6373"/>
                 </a:solidFill>
                 <a:latin typeface="맑은 고딕"/>
+                <a:ea typeface="맑은 고딕"/>
+                <a:cs typeface="맑은 고딕"/>
               </a:rPr>
               <a:t>클라우드인프라관리  ·  0주차 오리엔테이션</a:t>
             </a:r>
@@ -13509,6 +13813,8 @@
                   <a:srgbClr val="5B6373"/>
                 </a:solidFill>
                 <a:latin typeface="맑은 고딕"/>
+                <a:ea typeface="맑은 고딕"/>
+                <a:cs typeface="맑은 고딕"/>
               </a:rPr>
               <a:t>09 / 16</a:t>
             </a:r>

--- a/class/cloud_infra_mgmt/00주차_VM환경구성/01_강의자료/0주차_VM환경구성.pptx
+++ b/class/cloud_infra_mgmt/00주차_VM환경구성/01_강의자료/0주차_VM환경구성.pptx
@@ -17,6 +17,7 @@
     <p:sldId id="265" r:id="rId16"/>
     <p:sldId id="266" r:id="rId17"/>
     <p:sldId id="267" r:id="rId18"/>
+    <p:sldId id="273" r:id="rId25"/>
     <p:sldId id="268" r:id="rId19"/>
     <p:sldId id="269" r:id="rId20"/>
     <p:sldId id="270" r:id="rId21"/>
@@ -796,7 +797,7 @@
           <a:p/>
           <a:p>
             <a:r>
-              <a:t>"로그인 후 화면에 보이는 세 명령어를 순서대로 입력해보세요.</a:t>
+              <a:t>"로그인 후 화면에 보이는 명령어를 순서대로 입력해보세요.</a:t>
             </a:r>
           </a:p>
           <a:p/>
@@ -810,6 +811,28 @@
               <a:t>`kubectl version --client`</a:t>
             </a:r>
           </a:p>
+          <a:p/>
+          <a:p>
+            <a:r>
+              <a:t>**(minikube는 자동 기동이 안 됨을 강조)** minikube는 설치만 되어 있을 뿐 자동으로 실행되어 있지</a:t>
+            </a:r>
+          </a:p>
+          <a:p>
+            <a:r>
+              <a:t>않습니다. 그래서 아래처럼 `minikube start`로 먼저 클러스터를 기동한 뒤 상태를 확인해야 합니다.</a:t>
+            </a:r>
+          </a:p>
+          <a:p>
+            <a:r>
+              <a:t>VM을 껐다 켤 때마다 매번 다시 실행해야 한다는 점도 꼭 말씀드리세요.</a:t>
+            </a:r>
+          </a:p>
+          <a:p/>
+          <a:p>
+            <a:r>
+              <a:t>`minikube start`</a:t>
+            </a:r>
+          </a:p>
           <a:p>
             <a:r>
               <a:t>`minikube status`</a:t>
@@ -818,12 +841,22 @@
           <a:p/>
           <a:p>
             <a:r>
-              <a:t>**(확인 기준 설명)** 세 명령어 모두 오류 없이 버전이나 상태 정보가 출력되면 준비가 끝난 겁니다.</a:t>
-            </a:r>
-          </a:p>
-          <a:p>
-            <a:r>
-              <a:t>`minikube status`를 입력했을 때 host, kubelet, apiserver가 모두 Running으로 나오면 정상입니다.</a:t>
+              <a:t>**(확인 기준 설명)** `docker --version`과 `kubectl version --client`는 오류 없이 버전 정보가</a:t>
+            </a:r>
+          </a:p>
+          <a:p>
+            <a:r>
+              <a:t>출력되면 되고, `minikube status`는 host, kubelet, apiserver가 모두 Running으로 나와야 준비</a:t>
+            </a:r>
+          </a:p>
+          <a:p>
+            <a:r>
+              <a:t>완료입니다. stopped로 나온다면 `minikube start`를 먼저 실행하지 않았기 때문이니, `minikube start`</a:t>
+            </a:r>
+          </a:p>
+          <a:p>
+            <a:r>
+              <a:t>실행 후 다시 확인하라고 안내해주세요.</a:t>
             </a:r>
           </a:p>
           <a:p/>
@@ -1069,6 +1102,22 @@
           <a:p/>
           <a:p>
             <a:r>
+              <a:t>**minikube status가 stopped로 나온다** → `minikube start`를 실행하지 않았거나, VM을 재부팅해</a:t>
+            </a:r>
+          </a:p>
+          <a:p>
+            <a:r>
+              <a:t>클러스터가 다시 정지된 것입니다. VM을 켤 때마다 `minikube start`를 먼저 실행한 뒤 상태를</a:t>
+            </a:r>
+          </a:p>
+          <a:p>
+            <a:r>
+              <a:t>확인하라고 안내해주세요.</a:t>
+            </a:r>
+          </a:p>
+          <a:p/>
+          <a:p>
+            <a:r>
               <a:t>**그 외 문제** → 지금 해결이 안 되면 LMS Q&amp;A 게시판에 화면 캡처와 함께 남겨주시면, 제가 확인하고</a:t>
             </a:r>
           </a:p>
@@ -1167,12 +1216,17 @@
           </a:p>
           <a:p>
             <a:r>
-              <a:t>둘째, **docker --version, kubectl version --client, minikube status** 이 세 명령어로 언제든</a:t>
-            </a:r>
-          </a:p>
-          <a:p>
-            <a:r>
-              <a:t>준비 상태를 확인할 수 있습니다."</a:t>
+              <a:t>둘째, **docker --version, kubectl version --client, minikube start, minikube status** 이</a:t>
+            </a:r>
+          </a:p>
+          <a:p>
+            <a:r>
+              <a:t>명령어로 언제든 준비 상태를 확인할 수 있고, 실습을 마칠 때는 `sudo shutdown -h now`로 정상</a:t>
+            </a:r>
+          </a:p>
+          <a:p>
+            <a:r>
+              <a:t>종료해야 한다는 것도 함께 짚어주세요."</a:t>
             </a:r>
           </a:p>
         </p:txBody>
@@ -1422,6 +1476,141 @@
           <a:p>
             <a:r>
               <a:t>| "Killercoda도 나중에 계정이 필요해지나요?" | 아니요. 이 과목에서 쓰는 Killercoda 시나리오는 전부 링크 클릭만으로 접속하는 방식이라 학기 내내 계정이 필요 없습니다. |</a:t>
+            </a:r>
+          </a:p>
+        </p:txBody>
+      </p:sp>
+      <p:sp>
+        <p:nvSpPr>
+          <p:cNvPr id="4" name="Slide Number Placeholder 3"/>
+          <p:cNvSpPr>
+            <a:spLocks noGrp="1"/>
+          </p:cNvSpPr>
+          <p:nvPr>
+            <p:ph type="sldNum" idx="5" sz="quarter"/>
+          </p:nvPr>
+        </p:nvSpPr>
+        <p:spPr/>
+      </p:sp>
+    </p:spTree>
+  </p:cSld>
+  <p:clrMapOvr>
+    <a:masterClrMapping/>
+  </p:clrMapOvr>
+</p:notes>
+</file>
+
+<file path=ppt/notesSlides/notesSlide18.xml><?xml version="1.0" encoding="utf-8"?>
+<p:notes xmlns:a="http://schemas.openxmlformats.org/drawingml/2006/main" xmlns:p="http://schemas.openxmlformats.org/presentationml/2006/main" xmlns:r="http://schemas.openxmlformats.org/officeDocument/2006/relationships">
+  <p:cSld>
+    <p:spTree>
+      <p:nvGrpSpPr>
+        <p:cNvPr id="1" name=""/>
+        <p:cNvGrpSpPr/>
+        <p:nvPr/>
+      </p:nvGrpSpPr>
+      <p:grpSpPr>
+        <a:xfrm>
+          <a:off x="0" y="0"/>
+          <a:ext cx="0" cy="0"/>
+          <a:chOff x="0" y="0"/>
+          <a:chExt cx="0" cy="0"/>
+        </a:xfrm>
+      </p:grpSpPr>
+      <p:sp>
+        <p:nvSpPr>
+          <p:cNvPr id="2" name="Slide Image Placeholder 1"/>
+          <p:cNvSpPr>
+            <a:spLocks noGrp="1"/>
+          </p:cNvSpPr>
+          <p:nvPr>
+            <p:ph type="sldImg" idx="2"/>
+          </p:nvPr>
+        </p:nvSpPr>
+        <p:spPr/>
+      </p:sp>
+      <p:sp>
+        <p:nvSpPr>
+          <p:cNvPr id="3" name="Notes Placeholder 2"/>
+          <p:cNvSpPr>
+            <a:spLocks noGrp="1"/>
+          </p:cNvSpPr>
+          <p:nvPr>
+            <p:ph type="body" idx="3" sz="quarter"/>
+          </p:nvPr>
+        </p:nvSpPr>
+        <p:spPr/>
+        <p:txBody>
+          <a:bodyPr/>
+          <a:lstStyle/>
+          <a:p>
+            <a:r>
+              <a:t>[VM 종료하기]</a:t>
+            </a:r>
+          </a:p>
+          <a:p/>
+          <a:p>
+            <a:r>
+              <a:t>"실습을 마치고 VM을 끌 때는 반드시 정상 종료해야 합니다. 전원 강제 종료(Power Off)는 다음 실행</a:t>
+            </a:r>
+          </a:p>
+          <a:p>
+            <a:r>
+              <a:t>시 오류를 일으킬 수 있으니 피해야 합니다.</a:t>
+            </a:r>
+          </a:p>
+          <a:p/>
+          <a:p>
+            <a:r>
+              <a:t>방법은 두 가지입니다.</a:t>
+            </a:r>
+          </a:p>
+          <a:p/>
+          <a:p>
+            <a:r>
+              <a:t>**① VM 안에서 명령어로 종료 (권장)** — 터미널에 로그인된 상태에서 `sudo shutdown -h now`를</a:t>
+            </a:r>
+          </a:p>
+          <a:p>
+            <a:r>
+              <a:t>입력합니다. 비밀번호 `a1234`를 물어보면 입력하시면 되고, 이번에도 화면에 아무것도 안 보이는 게</a:t>
+            </a:r>
+          </a:p>
+          <a:p>
+            <a:r>
+              <a:t>정상입니다.</a:t>
+            </a:r>
+          </a:p>
+          <a:p/>
+          <a:p>
+            <a:r>
+              <a:t>**② VMware Workstation Player 메뉴에서 종료** — Player → Power → Shut Down Guest를 클릭합니다.</a:t>
+            </a:r>
+          </a:p>
+          <a:p>
+            <a:r>
+              <a:t>VM 내부로 종료 신호를 보내 정상 종료됩니다.</a:t>
+            </a:r>
+          </a:p>
+          <a:p/>
+          <a:p>
+            <a:r>
+              <a:t>**(경고 강조)** Player → Power → Power Off(강제 종료)는 전원 코드를 뽑는 것과 같아서 파일시스템이</a:t>
+            </a:r>
+          </a:p>
+          <a:p>
+            <a:r>
+              <a:t>손상될 수 있으니, 급한 경우가 아니면 사용하지 마세요. 다음에 VM을 다시 켜서 실습을 이어갈 때는</a:t>
+            </a:r>
+          </a:p>
+          <a:p>
+            <a:r>
+              <a:t>로그인 후 `minikube start`를 다시 실행해야 `minikube status`가 Running으로 나온다는 점도 함께</a:t>
+            </a:r>
+          </a:p>
+          <a:p>
+            <a:r>
+              <a:t>안내해주세요."</a:t>
             </a:r>
           </a:p>
         </p:txBody>
@@ -6624,7 +6813,7 @@
                 <a:ea typeface="맑은 고딕"/>
                 <a:cs typeface="맑은 고딕"/>
               </a:rPr>
-              <a:t>minikube status</a:t>
+              <a:t>minikube start</a:t>
             </a:r>
           </a:p>
           <a:p>
@@ -6653,7 +6842,36 @@
                 <a:ea typeface="맑은 고딕"/>
                 <a:cs typeface="맑은 고딕"/>
               </a:rPr>
-              <a:t>세 명령어 모두 오류 없이 버전/상태 정보가 출력되면 준비 완료</a:t>
+              <a:t>minikube status</a:t>
+            </a:r>
+          </a:p>
+          <a:p>
+            <a:pPr>
+              <a:lnSpc>
+                <a:spcPct val="149500"/>
+              </a:lnSpc>
+            </a:pPr>
+            <a:r>
+              <a:rPr sz="1700" b="1">
+                <a:solidFill>
+                  <a:srgbClr val="0D9488"/>
+                </a:solidFill>
+                <a:latin typeface="맑은 고딕"/>
+                <a:ea typeface="맑은 고딕"/>
+                <a:cs typeface="맑은 고딕"/>
+              </a:rPr>
+              <a:t>●  </a:t>
+            </a:r>
+            <a:r>
+              <a:rPr sz="1700" b="0">
+                <a:solidFill>
+                  <a:srgbClr val="222733"/>
+                </a:solidFill>
+                <a:latin typeface="맑은 고딕"/>
+                <a:ea typeface="맑은 고딕"/>
+                <a:cs typeface="맑은 고딕"/>
+              </a:rPr>
+              <a:t>docker --version과 kubectl version --client는 오류 없이 버전 정보가 출력되면 되고, minikube status는 host, kubelet, apiserver가 모두 Running으로 나와야 준비 완료 (stopped면 minikube start 먼저 실행)</a:t>
             </a:r>
           </a:p>
         </p:txBody>
@@ -6932,7 +7150,7 @@
                 <a:ea typeface="맑은 고딕"/>
                 <a:cs typeface="맑은 고딕"/>
               </a:rPr>
-              <a:t>04</a:t>
+              <a:t>03</a:t>
             </a:r>
           </a:p>
         </p:txBody>
@@ -6969,7 +7187,7 @@
                 <a:ea typeface="맑은 고딕"/>
                 <a:cs typeface="맑은 고딕"/>
               </a:rPr>
-              <a:t>PART 4 · 학기 중 필요한 계정</a:t>
+              <a:t>PART 3 · 환경 검증</a:t>
             </a:r>
           </a:p>
         </p:txBody>
@@ -7006,7 +7224,7 @@
                 <a:ea typeface="맑은 고딕"/>
                 <a:cs typeface="맑은 고딕"/>
               </a:rPr>
-              <a:t>학기 중 이런 계정을 만들게 됩니다</a:t>
+              <a:t>VM 종료하기</a:t>
             </a:r>
           </a:p>
         </p:txBody>
@@ -7058,7 +7276,7 @@
                 <a:ea typeface="맑은 고딕"/>
                 <a:cs typeface="맑은 고딕"/>
               </a:rPr>
-              <a:t>GitHub — 3주차 2차시에 가입 (소스 코드 저장용, 9~13주차까지 계속 재사용)</a:t>
+              <a:t>실습을 마치고 VM을 끌 때는 반드시 정상 종료 — 전원 강제 종료(Power Off)는 오류를 일으킬 수 있음</a:t>
             </a:r>
           </a:p>
           <a:p>
@@ -7087,7 +7305,7 @@
                 <a:ea typeface="맑은 고딕"/>
                 <a:cs typeface="맑은 고딕"/>
               </a:rPr>
-              <a:t>Docker Hub — 3주차 2차시에 가입 (이미지 push/pull용, 13주차 파이프라인에서도 재사용)</a:t>
+              <a:t>VM 안에서 명령어로 종료 (권장): sudo shutdown -h now</a:t>
             </a:r>
           </a:p>
           <a:p>
@@ -7116,7 +7334,7 @@
                 <a:ea typeface="맑은 고딕"/>
                 <a:cs typeface="맑은 고딕"/>
               </a:rPr>
-              <a:t>Terraform Cloud — 10주차 2차시에 가입 (원격 State 관리용, GitHub 계정으로 가입하면 편함)</a:t>
+              <a:t>VMware Player 메뉴에서 종료: Player → Power → Shut Down Guest</a:t>
             </a:r>
           </a:p>
         </p:txBody>
@@ -7197,7 +7415,7 @@
                 <a:ea typeface="맑은 고딕"/>
                 <a:cs typeface="맑은 고딕"/>
               </a:rPr>
-              <a:t>💡  미리 알아두면 좋은 것</a:t>
+              <a:t>⚠  Power Off는 사용하지 마세요</a:t>
             </a:r>
           </a:p>
         </p:txBody>
@@ -7234,7 +7452,7 @@
                 <a:ea typeface="맑은 고딕"/>
                 <a:cs typeface="맑은 고딕"/>
               </a:rPr>
-              <a:t>세 서비스를 동일한 이메일로 가입해두면 관리가 편합니다. Killercoda는 가입이 필요 없습니다 — 매 차시 제공되는 링크만 클릭하면 바로 실습할 수 있습니다.</a:t>
+              <a:t>전원 코드를 뽑는 것과 같아 파일시스템이 손상될 수 있습니다</a:t>
             </a:r>
           </a:p>
         </p:txBody>
@@ -7513,7 +7731,7 @@
                 <a:ea typeface="맑은 고딕"/>
                 <a:cs typeface="맑은 고딕"/>
               </a:rPr>
-              <a:t>05</a:t>
+              <a:t>04</a:t>
             </a:r>
           </a:p>
         </p:txBody>
@@ -7550,7 +7768,7 @@
                 <a:ea typeface="맑은 고딕"/>
                 <a:cs typeface="맑은 고딕"/>
               </a:rPr>
-              <a:t>질의응답</a:t>
+              <a:t>PART 4 · 학기 중 필요한 계정</a:t>
             </a:r>
           </a:p>
         </p:txBody>
@@ -7587,7 +7805,7 @@
                 <a:ea typeface="맑은 고딕"/>
                 <a:cs typeface="맑은 고딕"/>
               </a:rPr>
-              <a:t>자주 발생하는 문제와 해결</a:t>
+              <a:t>학기 중 이런 계정을 만들게 됩니다</a:t>
             </a:r>
           </a:p>
         </p:txBody>
@@ -7600,8 +7818,8 @@
         </p:nvSpPr>
         <p:spPr>
           <a:xfrm>
-            <a:off x="640080" y="1508760"/>
-            <a:ext cx="10881360" cy="4297680"/>
+            <a:off x="640080" y="1463040"/>
+            <a:ext cx="10881360" cy="3291840"/>
           </a:xfrm>
           <a:prstGeom prst="rect">
             <a:avLst/>
@@ -7639,7 +7857,7 @@
                 <a:ea typeface="맑은 고딕"/>
                 <a:cs typeface="맑은 고딕"/>
               </a:rPr>
-              <a:t>VM이 켜지지 않는다 → BIOS에서 가상화(Intel VT-x/AMD-V) 옵션이 켜져 있는지 확인</a:t>
+              <a:t>GitHub — 3주차 2차시에 가입 (소스 코드 저장용, 9~13주차까지 계속 재사용)</a:t>
             </a:r>
           </a:p>
           <a:p>
@@ -7668,7 +7886,7 @@
                 <a:ea typeface="맑은 고딕"/>
                 <a:cs typeface="맑은 고딕"/>
               </a:rPr>
-              <a:t>로그인이 안 된다 → 아이디/비밀번호는 student / a1234로 통일되어 있음</a:t>
+              <a:t>Docker Hub — 3주차 2차시에 가입 (이미지 push/pull용, 13주차 파이프라인에서도 재사용)</a:t>
             </a:r>
           </a:p>
           <a:p>
@@ -7697,21 +7915,65 @@
                 <a:ea typeface="맑은 고딕"/>
                 <a:cs typeface="맑은 고딕"/>
               </a:rPr>
-              <a:t>그 외 문제 → LMS Q&amp;A 게시판에 캡처와 함께 남겨주세요</a:t>
-            </a:r>
-          </a:p>
-        </p:txBody>
-      </p:sp>
-      <p:sp>
-        <p:nvSpPr>
-          <p:cNvPr id="8" name="TextBox 7"/>
+              <a:t>Terraform Cloud — 10주차 2차시에 가입 (원격 State 관리용, GitHub 계정으로 가입하면 편함)</a:t>
+            </a:r>
+          </a:p>
+        </p:txBody>
+      </p:sp>
+      <p:sp>
+        <p:nvSpPr>
+          <p:cNvPr id="8" name="Rectangle 7"/>
+          <p:cNvSpPr/>
+          <p:nvPr/>
+        </p:nvSpPr>
+        <p:spPr>
+          <a:xfrm>
+            <a:off x="640080" y="5074920"/>
+            <a:ext cx="10881360" cy="1143000"/>
+          </a:xfrm>
+          <a:prstGeom prst="rect">
+            <a:avLst/>
+          </a:prstGeom>
+          <a:solidFill>
+            <a:srgbClr val="0D9488"/>
+          </a:solidFill>
+          <a:ln>
+            <a:noFill/>
+          </a:ln>
+          <a:effectLst/>
+        </p:spPr>
+        <p:style>
+          <a:lnRef idx="1">
+            <a:schemeClr val="accent1"/>
+          </a:lnRef>
+          <a:fillRef idx="3">
+            <a:schemeClr val="accent1"/>
+          </a:fillRef>
+          <a:effectRef idx="2">
+            <a:schemeClr val="accent1"/>
+          </a:effectRef>
+          <a:fontRef idx="minor">
+            <a:schemeClr val="lt1"/>
+          </a:fontRef>
+        </p:style>
+        <p:txBody>
+          <a:bodyPr rtlCol="0" anchor="ctr"/>
+          <a:lstStyle/>
+          <a:p>
+            <a:pPr algn="ctr"/>
+          </a:p>
+        </p:txBody>
+      </p:sp>
+      <p:sp>
+        <p:nvSpPr>
+          <p:cNvPr id="9" name="TextBox 8"/>
           <p:cNvSpPr txBox="1"/>
           <p:nvPr/>
         </p:nvSpPr>
         <p:spPr>
           <a:xfrm>
-            <a:off x="457200" y="6528816"/>
-            <a:ext cx="7315200" cy="274320"/>
+            <a:off x="914400" y="5193792"/>
+            <a:ext cx="10332720" cy="365760"/>
           </a:xfrm>
           <a:prstGeom prst="rect">
             <a:avLst/>
@@ -7726,29 +7988,29 @@
           <a:p>
             <a:pPr algn="l"/>
             <a:r>
-              <a:rPr sz="900" b="0">
-                <a:solidFill>
-                  <a:srgbClr val="5B6373"/>
-                </a:solidFill>
-                <a:latin typeface="맑은 고딕"/>
-                <a:ea typeface="맑은 고딕"/>
-                <a:cs typeface="맑은 고딕"/>
-              </a:rPr>
-              <a:t>클라우드인프라관리  ·  0주차 오리엔테이션</a:t>
-            </a:r>
-          </a:p>
-        </p:txBody>
-      </p:sp>
-      <p:sp>
-        <p:nvSpPr>
-          <p:cNvPr id="9" name="TextBox 8"/>
+              <a:rPr sz="1500" b="1">
+                <a:solidFill>
+                  <a:srgbClr val="FFFFFF"/>
+                </a:solidFill>
+                <a:latin typeface="맑은 고딕"/>
+                <a:ea typeface="맑은 고딕"/>
+                <a:cs typeface="맑은 고딕"/>
+              </a:rPr>
+              <a:t>💡  미리 알아두면 좋은 것</a:t>
+            </a:r>
+          </a:p>
+        </p:txBody>
+      </p:sp>
+      <p:sp>
+        <p:nvSpPr>
+          <p:cNvPr id="10" name="TextBox 9"/>
           <p:cNvSpPr txBox="1"/>
           <p:nvPr/>
         </p:nvSpPr>
         <p:spPr>
           <a:xfrm>
-            <a:off x="10607040" y="6528816"/>
-            <a:ext cx="1188720" cy="274320"/>
+            <a:off x="914400" y="5577840"/>
+            <a:ext cx="10332720" cy="548640"/>
           </a:xfrm>
           <a:prstGeom prst="rect">
             <a:avLst/>
@@ -7763,6 +8025,43 @@
           <a:p>
             <a:pPr algn="l"/>
             <a:r>
+              <a:rPr sz="1300" b="0">
+                <a:solidFill>
+                  <a:srgbClr val="FFFFFF"/>
+                </a:solidFill>
+                <a:latin typeface="맑은 고딕"/>
+                <a:ea typeface="맑은 고딕"/>
+                <a:cs typeface="맑은 고딕"/>
+              </a:rPr>
+              <a:t>세 서비스를 동일한 이메일로 가입해두면 관리가 편합니다. Killercoda는 가입이 필요 없습니다 — 매 차시 제공되는 링크만 클릭하면 바로 실습할 수 있습니다.</a:t>
+            </a:r>
+          </a:p>
+        </p:txBody>
+      </p:sp>
+      <p:sp>
+        <p:nvSpPr>
+          <p:cNvPr id="11" name="TextBox 10"/>
+          <p:cNvSpPr txBox="1"/>
+          <p:nvPr/>
+        </p:nvSpPr>
+        <p:spPr>
+          <a:xfrm>
+            <a:off x="457200" y="6528816"/>
+            <a:ext cx="7315200" cy="274320"/>
+          </a:xfrm>
+          <a:prstGeom prst="rect">
+            <a:avLst/>
+          </a:prstGeom>
+          <a:noFill/>
+        </p:spPr>
+        <p:txBody>
+          <a:bodyPr wrap="square">
+            <a:spAutoFit/>
+          </a:bodyPr>
+          <a:lstStyle/>
+          <a:p>
+            <a:pPr algn="l"/>
+            <a:r>
               <a:rPr sz="900" b="0">
                 <a:solidFill>
                   <a:srgbClr val="5B6373"/>
@@ -7771,6 +8070,43 @@
                 <a:ea typeface="맑은 고딕"/>
                 <a:cs typeface="맑은 고딕"/>
               </a:rPr>
+              <a:t>클라우드인프라관리  ·  0주차 오리엔테이션</a:t>
+            </a:r>
+          </a:p>
+        </p:txBody>
+      </p:sp>
+      <p:sp>
+        <p:nvSpPr>
+          <p:cNvPr id="12" name="TextBox 11"/>
+          <p:cNvSpPr txBox="1"/>
+          <p:nvPr/>
+        </p:nvSpPr>
+        <p:spPr>
+          <a:xfrm>
+            <a:off x="10607040" y="6528816"/>
+            <a:ext cx="1188720" cy="274320"/>
+          </a:xfrm>
+          <a:prstGeom prst="rect">
+            <a:avLst/>
+          </a:prstGeom>
+          <a:noFill/>
+        </p:spPr>
+        <p:txBody>
+          <a:bodyPr wrap="square">
+            <a:spAutoFit/>
+          </a:bodyPr>
+          <a:lstStyle/>
+          <a:p>
+            <a:pPr algn="l"/>
+            <a:r>
+              <a:rPr sz="900" b="0">
+                <a:solidFill>
+                  <a:srgbClr val="5B6373"/>
+                </a:solidFill>
+                <a:latin typeface="맑은 고딕"/>
+                <a:ea typeface="맑은 고딕"/>
+                <a:cs typeface="맑은 고딕"/>
+              </a:rPr>
               <a:t>14 / 16</a:t>
             </a:r>
           </a:p>
@@ -7778,7 +8114,7 @@
       </p:sp>
       <p:sp>
         <p:nvSpPr>
-          <p:cNvPr id="10" name="Rectangle 9"/>
+          <p:cNvPr id="13" name="Rectangle 12"/>
           <p:cNvSpPr/>
           <p:nvPr/>
         </p:nvSpPr>
@@ -7847,7 +8183,7 @@
         <p:spPr>
           <a:xfrm>
             <a:off x="0" y="0"/>
-            <a:ext cx="12191695" cy="6858000"/>
+            <a:ext cx="12191695" cy="1051560"/>
           </a:xfrm>
           <a:prstGeom prst="rect">
             <a:avLst/>
@@ -7890,8 +8226,8 @@
         </p:nvSpPr>
         <p:spPr>
           <a:xfrm>
-            <a:off x="0" y="0"/>
-            <a:ext cx="164592" cy="6858000"/>
+            <a:off x="0" y="1051560"/>
+            <a:ext cx="12191695" cy="36576"/>
           </a:xfrm>
           <a:prstGeom prst="rect">
             <a:avLst/>
@@ -7928,51 +8264,14 @@
       </p:sp>
       <p:sp>
         <p:nvSpPr>
-          <p:cNvPr id="4" name="TextBox 3"/>
-          <p:cNvSpPr txBox="1"/>
-          <p:nvPr/>
-        </p:nvSpPr>
-        <p:spPr>
-          <a:xfrm>
-            <a:off x="822960" y="640080"/>
-            <a:ext cx="10058400" cy="548640"/>
-          </a:xfrm>
-          <a:prstGeom prst="rect">
-            <a:avLst/>
-          </a:prstGeom>
-          <a:noFill/>
-        </p:spPr>
-        <p:txBody>
-          <a:bodyPr wrap="square">
-            <a:spAutoFit/>
-          </a:bodyPr>
-          <a:lstStyle/>
-          <a:p>
-            <a:pPr algn="l"/>
-            <a:r>
-              <a:rPr sz="2800" b="1">
-                <a:solidFill>
-                  <a:srgbClr val="FFFFFF"/>
-                </a:solidFill>
-                <a:latin typeface="맑은 고딕"/>
-                <a:ea typeface="맑은 고딕"/>
-                <a:cs typeface="맑은 고딕"/>
-              </a:rPr>
-              <a:t>오늘의 정리</a:t>
-            </a:r>
-          </a:p>
-        </p:txBody>
-      </p:sp>
-      <p:sp>
-        <p:nvSpPr>
-          <p:cNvPr id="5" name="Rectangle 4"/>
+          <p:cNvPr id="4" name="Rectangle 3"/>
           <p:cNvSpPr/>
           <p:nvPr/>
         </p:nvSpPr>
         <p:spPr>
           <a:xfrm>
-            <a:off x="822960" y="1645920"/>
-            <a:ext cx="457200" cy="457200"/>
+            <a:off x="457200" y="256032"/>
+            <a:ext cx="777240" cy="548640"/>
           </a:xfrm>
           <a:prstGeom prst="rect">
             <a:avLst/>
@@ -8013,21 +8312,21 @@
                 <a:ea typeface="맑은 고딕"/>
                 <a:cs typeface="맑은 고딕"/>
               </a:rPr>
-              <a:t>1</a:t>
-            </a:r>
-          </a:p>
-        </p:txBody>
-      </p:sp>
-      <p:sp>
-        <p:nvSpPr>
-          <p:cNvPr id="6" name="TextBox 5"/>
+              <a:t>05</a:t>
+            </a:r>
+          </a:p>
+        </p:txBody>
+      </p:sp>
+      <p:sp>
+        <p:nvSpPr>
+          <p:cNvPr id="5" name="TextBox 4"/>
           <p:cNvSpPr txBox="1"/>
           <p:nvPr/>
         </p:nvSpPr>
         <p:spPr>
           <a:xfrm>
-            <a:off x="1463040" y="1691640"/>
-            <a:ext cx="9601200" cy="548640"/>
+            <a:off x="1417320" y="146304"/>
+            <a:ext cx="10241280" cy="365760"/>
           </a:xfrm>
           <a:prstGeom prst="rect">
             <a:avLst/>
@@ -8042,7 +8341,44 @@
           <a:p>
             <a:pPr algn="l"/>
             <a:r>
-              <a:rPr sz="1800" b="1">
+              <a:rPr sz="1200" b="1">
+                <a:solidFill>
+                  <a:srgbClr val="14B8A6"/>
+                </a:solidFill>
+                <a:latin typeface="맑은 고딕"/>
+                <a:ea typeface="맑은 고딕"/>
+                <a:cs typeface="맑은 고딕"/>
+              </a:rPr>
+              <a:t>질의응답</a:t>
+            </a:r>
+          </a:p>
+        </p:txBody>
+      </p:sp>
+      <p:sp>
+        <p:nvSpPr>
+          <p:cNvPr id="6" name="TextBox 5"/>
+          <p:cNvSpPr txBox="1"/>
+          <p:nvPr/>
+        </p:nvSpPr>
+        <p:spPr>
+          <a:xfrm>
+            <a:off x="1417320" y="457200"/>
+            <a:ext cx="10241280" cy="548640"/>
+          </a:xfrm>
+          <a:prstGeom prst="rect">
+            <a:avLst/>
+          </a:prstGeom>
+          <a:noFill/>
+        </p:spPr>
+        <p:txBody>
+          <a:bodyPr wrap="square">
+            <a:spAutoFit/>
+          </a:bodyPr>
+          <a:lstStyle/>
+          <a:p>
+            <a:pPr algn="l"/>
+            <a:r>
+              <a:rPr sz="2500" b="1">
                 <a:solidFill>
                   <a:srgbClr val="FFFFFF"/>
                 </a:solidFill>
@@ -8050,27 +8386,240 @@
                 <a:ea typeface="맑은 고딕"/>
                 <a:cs typeface="맑은 고딕"/>
               </a:rPr>
-              <a:t>이 VM 하나로 0주차부터 7주차까지 모든 실습을 진행한다</a:t>
-            </a:r>
-          </a:p>
-        </p:txBody>
-      </p:sp>
-      <p:sp>
-        <p:nvSpPr>
-          <p:cNvPr id="7" name="Rectangle 6"/>
+              <a:t>자주 발생하는 문제와 해결</a:t>
+            </a:r>
+          </a:p>
+        </p:txBody>
+      </p:sp>
+      <p:sp>
+        <p:nvSpPr>
+          <p:cNvPr id="7" name="TextBox 6"/>
+          <p:cNvSpPr txBox="1"/>
+          <p:nvPr/>
+        </p:nvSpPr>
+        <p:spPr>
+          <a:xfrm>
+            <a:off x="640080" y="1508760"/>
+            <a:ext cx="10881360" cy="4297680"/>
+          </a:xfrm>
+          <a:prstGeom prst="rect">
+            <a:avLst/>
+          </a:prstGeom>
+          <a:noFill/>
+        </p:spPr>
+        <p:txBody>
+          <a:bodyPr wrap="square">
+            <a:spAutoFit/>
+          </a:bodyPr>
+          <a:lstStyle/>
+          <a:p>
+            <a:pPr>
+              <a:lnSpc>
+                <a:spcPct val="149500"/>
+              </a:lnSpc>
+            </a:pPr>
+            <a:r>
+              <a:rPr sz="1700" b="1">
+                <a:solidFill>
+                  <a:srgbClr val="0D9488"/>
+                </a:solidFill>
+                <a:latin typeface="맑은 고딕"/>
+                <a:ea typeface="맑은 고딕"/>
+                <a:cs typeface="맑은 고딕"/>
+              </a:rPr>
+              <a:t>●  </a:t>
+            </a:r>
+            <a:r>
+              <a:rPr sz="1700" b="0">
+                <a:solidFill>
+                  <a:srgbClr val="222733"/>
+                </a:solidFill>
+                <a:latin typeface="맑은 고딕"/>
+                <a:ea typeface="맑은 고딕"/>
+                <a:cs typeface="맑은 고딕"/>
+              </a:rPr>
+              <a:t>VM이 켜지지 않는다 → BIOS에서 가상화(Intel VT-x/AMD-V) 옵션이 켜져 있는지 확인</a:t>
+            </a:r>
+          </a:p>
+          <a:p>
+            <a:pPr>
+              <a:lnSpc>
+                <a:spcPct val="149500"/>
+              </a:lnSpc>
+            </a:pPr>
+            <a:r>
+              <a:rPr sz="1700" b="1">
+                <a:solidFill>
+                  <a:srgbClr val="0D9488"/>
+                </a:solidFill>
+                <a:latin typeface="맑은 고딕"/>
+                <a:ea typeface="맑은 고딕"/>
+                <a:cs typeface="맑은 고딕"/>
+              </a:rPr>
+              <a:t>●  </a:t>
+            </a:r>
+            <a:r>
+              <a:rPr sz="1700" b="0">
+                <a:solidFill>
+                  <a:srgbClr val="222733"/>
+                </a:solidFill>
+                <a:latin typeface="맑은 고딕"/>
+                <a:ea typeface="맑은 고딕"/>
+                <a:cs typeface="맑은 고딕"/>
+              </a:rPr>
+              <a:t>로그인이 안 된다 → 아이디/비밀번호는 student / a1234로 통일되어 있음</a:t>
+            </a:r>
+          </a:p>
+          <a:p>
+            <a:pPr>
+              <a:lnSpc>
+                <a:spcPct val="149500"/>
+              </a:lnSpc>
+            </a:pPr>
+            <a:r>
+              <a:rPr sz="1700" b="1">
+                <a:solidFill>
+                  <a:srgbClr val="0D9488"/>
+                </a:solidFill>
+                <a:latin typeface="맑은 고딕"/>
+                <a:ea typeface="맑은 고딕"/>
+                <a:cs typeface="맑은 고딕"/>
+              </a:rPr>
+              <a:t>●  </a:t>
+            </a:r>
+            <a:r>
+              <a:rPr sz="1700" b="0">
+                <a:solidFill>
+                  <a:srgbClr val="222733"/>
+                </a:solidFill>
+                <a:latin typeface="맑은 고딕"/>
+                <a:ea typeface="맑은 고딕"/>
+                <a:cs typeface="맑은 고딕"/>
+              </a:rPr>
+              <a:t>minikube status가 stopped로 나온다 → minikube start를 먼저 실행한 뒤 다시 확인</a:t>
+            </a:r>
+          </a:p>
+          <a:p>
+            <a:pPr>
+              <a:lnSpc>
+                <a:spcPct val="149500"/>
+              </a:lnSpc>
+            </a:pPr>
+            <a:r>
+              <a:rPr sz="1700" b="1">
+                <a:solidFill>
+                  <a:srgbClr val="0D9488"/>
+                </a:solidFill>
+                <a:latin typeface="맑은 고딕"/>
+                <a:ea typeface="맑은 고딕"/>
+                <a:cs typeface="맑은 고딕"/>
+              </a:rPr>
+              <a:t>●  </a:t>
+            </a:r>
+            <a:r>
+              <a:rPr sz="1700" b="0">
+                <a:solidFill>
+                  <a:srgbClr val="222733"/>
+                </a:solidFill>
+                <a:latin typeface="맑은 고딕"/>
+                <a:ea typeface="맑은 고딕"/>
+                <a:cs typeface="맑은 고딕"/>
+              </a:rPr>
+              <a:t>그 외 문제 → LMS Q&amp;A 게시판에 캡처와 함께 남겨주세요</a:t>
+            </a:r>
+          </a:p>
+        </p:txBody>
+      </p:sp>
+      <p:sp>
+        <p:nvSpPr>
+          <p:cNvPr id="8" name="TextBox 7"/>
+          <p:cNvSpPr txBox="1"/>
+          <p:nvPr/>
+        </p:nvSpPr>
+        <p:spPr>
+          <a:xfrm>
+            <a:off x="457200" y="6528816"/>
+            <a:ext cx="7315200" cy="274320"/>
+          </a:xfrm>
+          <a:prstGeom prst="rect">
+            <a:avLst/>
+          </a:prstGeom>
+          <a:noFill/>
+        </p:spPr>
+        <p:txBody>
+          <a:bodyPr wrap="square">
+            <a:spAutoFit/>
+          </a:bodyPr>
+          <a:lstStyle/>
+          <a:p>
+            <a:pPr algn="l"/>
+            <a:r>
+              <a:rPr sz="900" b="0">
+                <a:solidFill>
+                  <a:srgbClr val="5B6373"/>
+                </a:solidFill>
+                <a:latin typeface="맑은 고딕"/>
+                <a:ea typeface="맑은 고딕"/>
+                <a:cs typeface="맑은 고딕"/>
+              </a:rPr>
+              <a:t>클라우드인프라관리  ·  0주차 오리엔테이션</a:t>
+            </a:r>
+          </a:p>
+        </p:txBody>
+      </p:sp>
+      <p:sp>
+        <p:nvSpPr>
+          <p:cNvPr id="9" name="TextBox 8"/>
+          <p:cNvSpPr txBox="1"/>
+          <p:nvPr/>
+        </p:nvSpPr>
+        <p:spPr>
+          <a:xfrm>
+            <a:off x="10607040" y="6528816"/>
+            <a:ext cx="1188720" cy="274320"/>
+          </a:xfrm>
+          <a:prstGeom prst="rect">
+            <a:avLst/>
+          </a:prstGeom>
+          <a:noFill/>
+        </p:spPr>
+        <p:txBody>
+          <a:bodyPr wrap="square">
+            <a:spAutoFit/>
+          </a:bodyPr>
+          <a:lstStyle/>
+          <a:p>
+            <a:pPr algn="l"/>
+            <a:r>
+              <a:rPr sz="900" b="0">
+                <a:solidFill>
+                  <a:srgbClr val="5B6373"/>
+                </a:solidFill>
+                <a:latin typeface="맑은 고딕"/>
+                <a:ea typeface="맑은 고딕"/>
+                <a:cs typeface="맑은 고딕"/>
+              </a:rPr>
+              <a:t>15 / 16</a:t>
+            </a:r>
+          </a:p>
+        </p:txBody>
+      </p:sp>
+      <p:sp>
+        <p:nvSpPr>
+          <p:cNvPr id="10" name="Rectangle 9"/>
           <p:cNvSpPr/>
           <p:nvPr/>
         </p:nvSpPr>
         <p:spPr>
           <a:xfrm>
-            <a:off x="822960" y="2423160"/>
-            <a:ext cx="457200" cy="457200"/>
+            <a:off x="457200" y="6473952"/>
+            <a:ext cx="11274552" cy="9144"/>
           </a:xfrm>
           <a:prstGeom prst="rect">
             <a:avLst/>
           </a:prstGeom>
           <a:solidFill>
-            <a:srgbClr val="14B8A6"/>
+            <a:srgbClr val="E3E7EE"/>
           </a:solidFill>
           <a:ln>
             <a:noFill/>
@@ -8092,58 +8641,10 @@
           </a:fontRef>
         </p:style>
         <p:txBody>
-          <a:bodyPr rtlCol="0" anchor="ctr" wrap="square"/>
+          <a:bodyPr rtlCol="0" anchor="ctr"/>
           <a:lstStyle/>
           <a:p>
             <a:pPr algn="ctr"/>
-            <a:r>
-              <a:rPr sz="1600" b="1">
-                <a:solidFill>
-                  <a:srgbClr val="14213D"/>
-                </a:solidFill>
-                <a:latin typeface="맑은 고딕"/>
-                <a:ea typeface="맑은 고딕"/>
-                <a:cs typeface="맑은 고딕"/>
-              </a:rPr>
-              <a:t>2</a:t>
-            </a:r>
-          </a:p>
-        </p:txBody>
-      </p:sp>
-      <p:sp>
-        <p:nvSpPr>
-          <p:cNvPr id="8" name="TextBox 7"/>
-          <p:cNvSpPr txBox="1"/>
-          <p:nvPr/>
-        </p:nvSpPr>
-        <p:spPr>
-          <a:xfrm>
-            <a:off x="1463040" y="2468879"/>
-            <a:ext cx="9601200" cy="548640"/>
-          </a:xfrm>
-          <a:prstGeom prst="rect">
-            <a:avLst/>
-          </a:prstGeom>
-          <a:noFill/>
-        </p:spPr>
-        <p:txBody>
-          <a:bodyPr wrap="square">
-            <a:spAutoFit/>
-          </a:bodyPr>
-          <a:lstStyle/>
-          <a:p>
-            <a:pPr algn="l"/>
-            <a:r>
-              <a:rPr sz="1800" b="1">
-                <a:solidFill>
-                  <a:srgbClr val="FFFFFF"/>
-                </a:solidFill>
-                <a:latin typeface="맑은 고딕"/>
-                <a:ea typeface="맑은 고딕"/>
-                <a:cs typeface="맑은 고딕"/>
-              </a:rPr>
-              <a:t>docker --version / kubectl version --client / minikube status 세 명령어로 준비 상태를 확인한다</a:t>
-            </a:r>
           </a:p>
         </p:txBody>
       </p:sp>
@@ -8285,21 +8786,76 @@
                 <a:ea typeface="맑은 고딕"/>
                 <a:cs typeface="맑은 고딕"/>
               </a:rPr>
-              <a:t>다음 주 예고</a:t>
-            </a:r>
-          </a:p>
-        </p:txBody>
-      </p:sp>
-      <p:sp>
-        <p:nvSpPr>
-          <p:cNvPr id="5" name="TextBox 4"/>
+              <a:t>오늘의 정리</a:t>
+            </a:r>
+          </a:p>
+        </p:txBody>
+      </p:sp>
+      <p:sp>
+        <p:nvSpPr>
+          <p:cNvPr id="5" name="Rectangle 4"/>
+          <p:cNvSpPr/>
+          <p:nvPr/>
+        </p:nvSpPr>
+        <p:spPr>
+          <a:xfrm>
+            <a:off x="822960" y="1645920"/>
+            <a:ext cx="457200" cy="457200"/>
+          </a:xfrm>
+          <a:prstGeom prst="rect">
+            <a:avLst/>
+          </a:prstGeom>
+          <a:solidFill>
+            <a:srgbClr val="14B8A6"/>
+          </a:solidFill>
+          <a:ln>
+            <a:noFill/>
+          </a:ln>
+          <a:effectLst/>
+        </p:spPr>
+        <p:style>
+          <a:lnRef idx="1">
+            <a:schemeClr val="accent1"/>
+          </a:lnRef>
+          <a:fillRef idx="3">
+            <a:schemeClr val="accent1"/>
+          </a:fillRef>
+          <a:effectRef idx="2">
+            <a:schemeClr val="accent1"/>
+          </a:effectRef>
+          <a:fontRef idx="minor">
+            <a:schemeClr val="lt1"/>
+          </a:fontRef>
+        </p:style>
+        <p:txBody>
+          <a:bodyPr rtlCol="0" anchor="ctr" wrap="square"/>
+          <a:lstStyle/>
+          <a:p>
+            <a:pPr algn="ctr"/>
+            <a:r>
+              <a:rPr sz="1600" b="1">
+                <a:solidFill>
+                  <a:srgbClr val="14213D"/>
+                </a:solidFill>
+                <a:latin typeface="맑은 고딕"/>
+                <a:ea typeface="맑은 고딕"/>
+                <a:cs typeface="맑은 고딕"/>
+              </a:rPr>
+              <a:t>1</a:t>
+            </a:r>
+          </a:p>
+        </p:txBody>
+      </p:sp>
+      <p:sp>
+        <p:nvSpPr>
+          <p:cNvPr id="6" name="TextBox 5"/>
           <p:cNvSpPr txBox="1"/>
           <p:nvPr/>
         </p:nvSpPr>
         <p:spPr>
           <a:xfrm>
-            <a:off x="1051560" y="1645920"/>
-            <a:ext cx="9875520" cy="365760"/>
+            <a:off x="1463040" y="1691640"/>
+            <a:ext cx="9601200" cy="548640"/>
           </a:xfrm>
           <a:prstGeom prst="rect">
             <a:avLst/>
@@ -8314,29 +8870,84 @@
           <a:p>
             <a:pPr algn="l"/>
             <a:r>
-              <a:rPr sz="1500" b="1">
-                <a:solidFill>
-                  <a:srgbClr val="14B8A6"/>
-                </a:solidFill>
-                <a:latin typeface="맑은 고딕"/>
-                <a:ea typeface="맑은 고딕"/>
-                <a:cs typeface="맑은 고딕"/>
-              </a:rPr>
-              <a:t>다음 차시 예고 — 1주차 — 클라우드 개념과 Docker 입문</a:t>
-            </a:r>
-          </a:p>
-        </p:txBody>
-      </p:sp>
-      <p:sp>
-        <p:nvSpPr>
-          <p:cNvPr id="6" name="TextBox 5"/>
+              <a:rPr sz="1800" b="1">
+                <a:solidFill>
+                  <a:srgbClr val="FFFFFF"/>
+                </a:solidFill>
+                <a:latin typeface="맑은 고딕"/>
+                <a:ea typeface="맑은 고딕"/>
+                <a:cs typeface="맑은 고딕"/>
+              </a:rPr>
+              <a:t>이 VM 하나로 0주차부터 7주차까지 모든 실습을 진행한다</a:t>
+            </a:r>
+          </a:p>
+        </p:txBody>
+      </p:sp>
+      <p:sp>
+        <p:nvSpPr>
+          <p:cNvPr id="7" name="Rectangle 6"/>
+          <p:cNvSpPr/>
+          <p:nvPr/>
+        </p:nvSpPr>
+        <p:spPr>
+          <a:xfrm>
+            <a:off x="822960" y="2423160"/>
+            <a:ext cx="457200" cy="457200"/>
+          </a:xfrm>
+          <a:prstGeom prst="rect">
+            <a:avLst/>
+          </a:prstGeom>
+          <a:solidFill>
+            <a:srgbClr val="14B8A6"/>
+          </a:solidFill>
+          <a:ln>
+            <a:noFill/>
+          </a:ln>
+          <a:effectLst/>
+        </p:spPr>
+        <p:style>
+          <a:lnRef idx="1">
+            <a:schemeClr val="accent1"/>
+          </a:lnRef>
+          <a:fillRef idx="3">
+            <a:schemeClr val="accent1"/>
+          </a:fillRef>
+          <a:effectRef idx="2">
+            <a:schemeClr val="accent1"/>
+          </a:effectRef>
+          <a:fontRef idx="minor">
+            <a:schemeClr val="lt1"/>
+          </a:fontRef>
+        </p:style>
+        <p:txBody>
+          <a:bodyPr rtlCol="0" anchor="ctr" wrap="square"/>
+          <a:lstStyle/>
+          <a:p>
+            <a:pPr algn="ctr"/>
+            <a:r>
+              <a:rPr sz="1600" b="1">
+                <a:solidFill>
+                  <a:srgbClr val="14213D"/>
+                </a:solidFill>
+                <a:latin typeface="맑은 고딕"/>
+                <a:ea typeface="맑은 고딕"/>
+                <a:cs typeface="맑은 고딕"/>
+              </a:rPr>
+              <a:t>2</a:t>
+            </a:r>
+          </a:p>
+        </p:txBody>
+      </p:sp>
+      <p:sp>
+        <p:nvSpPr>
+          <p:cNvPr id="8" name="TextBox 7"/>
           <p:cNvSpPr txBox="1"/>
           <p:nvPr/>
         </p:nvSpPr>
         <p:spPr>
           <a:xfrm>
-            <a:off x="1051560" y="2103120"/>
-            <a:ext cx="9875520" cy="914400"/>
+            <a:off x="1463040" y="2468879"/>
+            <a:ext cx="9601200" cy="548640"/>
           </a:xfrm>
           <a:prstGeom prst="rect">
             <a:avLst/>
@@ -8351,7 +8962,7 @@
           <a:p>
             <a:pPr algn="l"/>
             <a:r>
-              <a:rPr sz="1700" b="0">
+              <a:rPr sz="1800" b="1">
                 <a:solidFill>
                   <a:srgbClr val="FFFFFF"/>
                 </a:solidFill>
@@ -8359,7 +8970,7 @@
                 <a:ea typeface="맑은 고딕"/>
                 <a:cs typeface="맑은 고딕"/>
               </a:rPr>
-              <a:t>가상화와 클라우드 컴퓨팅의 기본 개념을 배우고, 오늘 준비한 VM에서 첫 컨테이너를 직접 실행해봅니다.</a:t>
+              <a:t>docker --version / kubectl version --client / minikube start / minikube status 네 명령어로 준비 상태를 확인한다</a:t>
             </a:r>
           </a:p>
         </p:txBody>
@@ -8373,6 +8984,223 @@
 </file>
 
 <file path=ppt/slides/slide17.xml><?xml version="1.0" encoding="utf-8"?>
+<p:sld xmlns:a="http://schemas.openxmlformats.org/drawingml/2006/main" xmlns:p="http://schemas.openxmlformats.org/presentationml/2006/main" xmlns:r="http://schemas.openxmlformats.org/officeDocument/2006/relationships">
+  <p:cSld>
+    <p:spTree>
+      <p:nvGrpSpPr>
+        <p:cNvPr id="1" name=""/>
+        <p:cNvGrpSpPr/>
+        <p:nvPr/>
+      </p:nvGrpSpPr>
+      <p:grpSpPr/>
+      <p:sp>
+        <p:nvSpPr>
+          <p:cNvPr id="2" name="Rectangle 1"/>
+          <p:cNvSpPr/>
+          <p:nvPr/>
+        </p:nvSpPr>
+        <p:spPr>
+          <a:xfrm>
+            <a:off x="0" y="0"/>
+            <a:ext cx="12191695" cy="6858000"/>
+          </a:xfrm>
+          <a:prstGeom prst="rect">
+            <a:avLst/>
+          </a:prstGeom>
+          <a:solidFill>
+            <a:srgbClr val="14213D"/>
+          </a:solidFill>
+          <a:ln>
+            <a:noFill/>
+          </a:ln>
+          <a:effectLst/>
+        </p:spPr>
+        <p:style>
+          <a:lnRef idx="1">
+            <a:schemeClr val="accent1"/>
+          </a:lnRef>
+          <a:fillRef idx="3">
+            <a:schemeClr val="accent1"/>
+          </a:fillRef>
+          <a:effectRef idx="2">
+            <a:schemeClr val="accent1"/>
+          </a:effectRef>
+          <a:fontRef idx="minor">
+            <a:schemeClr val="lt1"/>
+          </a:fontRef>
+        </p:style>
+        <p:txBody>
+          <a:bodyPr rtlCol="0" anchor="ctr"/>
+          <a:lstStyle/>
+          <a:p>
+            <a:pPr algn="ctr"/>
+          </a:p>
+        </p:txBody>
+      </p:sp>
+      <p:sp>
+        <p:nvSpPr>
+          <p:cNvPr id="3" name="Rectangle 2"/>
+          <p:cNvSpPr/>
+          <p:nvPr/>
+        </p:nvSpPr>
+        <p:spPr>
+          <a:xfrm>
+            <a:off x="0" y="0"/>
+            <a:ext cx="164592" cy="6858000"/>
+          </a:xfrm>
+          <a:prstGeom prst="rect">
+            <a:avLst/>
+          </a:prstGeom>
+          <a:solidFill>
+            <a:srgbClr val="14B8A6"/>
+          </a:solidFill>
+          <a:ln>
+            <a:noFill/>
+          </a:ln>
+          <a:effectLst/>
+        </p:spPr>
+        <p:style>
+          <a:lnRef idx="1">
+            <a:schemeClr val="accent1"/>
+          </a:lnRef>
+          <a:fillRef idx="3">
+            <a:schemeClr val="accent1"/>
+          </a:fillRef>
+          <a:effectRef idx="2">
+            <a:schemeClr val="accent1"/>
+          </a:effectRef>
+          <a:fontRef idx="minor">
+            <a:schemeClr val="lt1"/>
+          </a:fontRef>
+        </p:style>
+        <p:txBody>
+          <a:bodyPr rtlCol="0" anchor="ctr"/>
+          <a:lstStyle/>
+          <a:p>
+            <a:pPr algn="ctr"/>
+          </a:p>
+        </p:txBody>
+      </p:sp>
+      <p:sp>
+        <p:nvSpPr>
+          <p:cNvPr id="4" name="TextBox 3"/>
+          <p:cNvSpPr txBox="1"/>
+          <p:nvPr/>
+        </p:nvSpPr>
+        <p:spPr>
+          <a:xfrm>
+            <a:off x="822960" y="640080"/>
+            <a:ext cx="10058400" cy="548640"/>
+          </a:xfrm>
+          <a:prstGeom prst="rect">
+            <a:avLst/>
+          </a:prstGeom>
+          <a:noFill/>
+        </p:spPr>
+        <p:txBody>
+          <a:bodyPr wrap="square">
+            <a:spAutoFit/>
+          </a:bodyPr>
+          <a:lstStyle/>
+          <a:p>
+            <a:pPr algn="l"/>
+            <a:r>
+              <a:rPr sz="2800" b="1">
+                <a:solidFill>
+                  <a:srgbClr val="FFFFFF"/>
+                </a:solidFill>
+                <a:latin typeface="맑은 고딕"/>
+                <a:ea typeface="맑은 고딕"/>
+                <a:cs typeface="맑은 고딕"/>
+              </a:rPr>
+              <a:t>다음 주 예고</a:t>
+            </a:r>
+          </a:p>
+        </p:txBody>
+      </p:sp>
+      <p:sp>
+        <p:nvSpPr>
+          <p:cNvPr id="5" name="TextBox 4"/>
+          <p:cNvSpPr txBox="1"/>
+          <p:nvPr/>
+        </p:nvSpPr>
+        <p:spPr>
+          <a:xfrm>
+            <a:off x="1051560" y="1645920"/>
+            <a:ext cx="9875520" cy="365760"/>
+          </a:xfrm>
+          <a:prstGeom prst="rect">
+            <a:avLst/>
+          </a:prstGeom>
+          <a:noFill/>
+        </p:spPr>
+        <p:txBody>
+          <a:bodyPr wrap="square">
+            <a:spAutoFit/>
+          </a:bodyPr>
+          <a:lstStyle/>
+          <a:p>
+            <a:pPr algn="l"/>
+            <a:r>
+              <a:rPr sz="1500" b="1">
+                <a:solidFill>
+                  <a:srgbClr val="14B8A6"/>
+                </a:solidFill>
+                <a:latin typeface="맑은 고딕"/>
+                <a:ea typeface="맑은 고딕"/>
+                <a:cs typeface="맑은 고딕"/>
+              </a:rPr>
+              <a:t>다음 차시 예고 — 1주차 — 클라우드 개념과 Docker 입문</a:t>
+            </a:r>
+          </a:p>
+        </p:txBody>
+      </p:sp>
+      <p:sp>
+        <p:nvSpPr>
+          <p:cNvPr id="6" name="TextBox 5"/>
+          <p:cNvSpPr txBox="1"/>
+          <p:nvPr/>
+        </p:nvSpPr>
+        <p:spPr>
+          <a:xfrm>
+            <a:off x="1051560" y="2103120"/>
+            <a:ext cx="9875520" cy="914400"/>
+          </a:xfrm>
+          <a:prstGeom prst="rect">
+            <a:avLst/>
+          </a:prstGeom>
+          <a:noFill/>
+        </p:spPr>
+        <p:txBody>
+          <a:bodyPr wrap="square">
+            <a:spAutoFit/>
+          </a:bodyPr>
+          <a:lstStyle/>
+          <a:p>
+            <a:pPr algn="l"/>
+            <a:r>
+              <a:rPr sz="1700" b="0">
+                <a:solidFill>
+                  <a:srgbClr val="FFFFFF"/>
+                </a:solidFill>
+                <a:latin typeface="맑은 고딕"/>
+                <a:ea typeface="맑은 고딕"/>
+                <a:cs typeface="맑은 고딕"/>
+              </a:rPr>
+              <a:t>가상화와 클라우드 컴퓨팅의 기본 개념을 배우고, 오늘 준비한 VM에서 첫 컨테이너를 직접 실행해봅니다.</a:t>
+            </a:r>
+          </a:p>
+        </p:txBody>
+      </p:sp>
+    </p:spTree>
+  </p:cSld>
+  <p:clrMapOvr>
+    <a:masterClrMapping/>
+  </p:clrMapOvr>
+</p:sld>
+</file>
+
+<file path=ppt/slides/slide18.xml><?xml version="1.0" encoding="utf-8"?>
 <p:sld xmlns:a="http://schemas.openxmlformats.org/drawingml/2006/main" xmlns:p="http://schemas.openxmlformats.org/presentationml/2006/main" xmlns:r="http://schemas.openxmlformats.org/officeDocument/2006/relationships">
   <p:cSld>
     <p:spTree>

--- a/class/cloud_infra_mgmt/00주차_VM환경구성/01_강의자료/0주차_VM환경구성.pptx
+++ b/class/cloud_infra_mgmt/00주차_VM환경구성/01_강의자료/0주차_VM환경구성.pptx
@@ -6189,7 +6189,7 @@
                 <a:ea typeface="맑은 고딕"/>
                 <a:cs typeface="맑은 고딕"/>
               </a:rPr>
-              <a:t>10 / 16</a:t>
+              <a:t>10 / 18</a:t>
             </a:r>
           </a:p>
         </p:txBody>
@@ -6703,7 +6703,7 @@
                 <a:ea typeface="맑은 고딕"/>
                 <a:cs typeface="맑은 고딕"/>
               </a:rPr>
-              <a:t>세 가지 명령어로 확인하기</a:t>
+              <a:t>네 가지 명령어로 확인하기</a:t>
             </a:r>
           </a:p>
         </p:txBody>
@@ -6945,7 +6945,7 @@
                 <a:ea typeface="맑은 고딕"/>
                 <a:cs typeface="맑은 고딕"/>
               </a:rPr>
-              <a:t>12 / 16</a:t>
+              <a:t>12 / 18</a:t>
             </a:r>
           </a:p>
         </p:txBody>
@@ -7526,7 +7526,7 @@
                 <a:ea typeface="맑은 고딕"/>
                 <a:cs typeface="맑은 고딕"/>
               </a:rPr>
-              <a:t>13 / 16</a:t>
+              <a:t>13 / 18</a:t>
             </a:r>
           </a:p>
         </p:txBody>
@@ -8107,7 +8107,7 @@
                 <a:ea typeface="맑은 고딕"/>
                 <a:cs typeface="맑은 고딕"/>
               </a:rPr>
-              <a:t>14 / 16</a:t>
+              <a:t>14 / 18</a:t>
             </a:r>
           </a:p>
         </p:txBody>
@@ -8599,7 +8599,7 @@
                 <a:ea typeface="맑은 고딕"/>
                 <a:cs typeface="맑은 고딕"/>
               </a:rPr>
-              <a:t>15 / 16</a:t>
+              <a:t>15 / 18</a:t>
             </a:r>
           </a:p>
         </p:txBody>
@@ -9801,7 +9801,7 @@
                 <a:ea typeface="맑은 고딕"/>
                 <a:cs typeface="맑은 고딕"/>
               </a:rPr>
-              <a:t>02 / 16</a:t>
+              <a:t>02 / 18</a:t>
             </a:r>
           </a:p>
         </p:txBody>
@@ -11059,7 +11059,7 @@
                 <a:ea typeface="맑은 고딕"/>
                 <a:cs typeface="맑은 고딕"/>
               </a:rPr>
-              <a:t>03 / 16</a:t>
+              <a:t>03 / 18</a:t>
             </a:r>
           </a:p>
         </p:txBody>
@@ -11875,7 +11875,7 @@
                 <a:ea typeface="맑은 고딕"/>
                 <a:cs typeface="맑은 고딕"/>
               </a:rPr>
-              <a:t>05 / 16</a:t>
+              <a:t>05 / 18</a:t>
             </a:r>
           </a:p>
         </p:txBody>
@@ -13038,7 +13038,7 @@
                 <a:ea typeface="맑은 고딕"/>
                 <a:cs typeface="맑은 고딕"/>
               </a:rPr>
-              <a:t>06 / 16</a:t>
+              <a:t>06 / 18</a:t>
             </a:r>
           </a:p>
         </p:txBody>
@@ -13736,7 +13736,7 @@
                 <a:ea typeface="맑은 고딕"/>
                 <a:cs typeface="맑은 고딕"/>
               </a:rPr>
-              <a:t>08 / 16</a:t>
+              <a:t>08 / 18</a:t>
             </a:r>
           </a:p>
         </p:txBody>
@@ -14644,7 +14644,7 @@
                 <a:ea typeface="맑은 고딕"/>
                 <a:cs typeface="맑은 고딕"/>
               </a:rPr>
-              <a:t>09 / 16</a:t>
+              <a:t>09 / 18</a:t>
             </a:r>
           </a:p>
         </p:txBody>
